--- a/Презентации/Ассортиментный анализ.pptx
+++ b/Презентации/Ассортиментный анализ.pptx
@@ -7,13 +7,14 @@
   <p:sldIdLst>
     <p:sldId id="256" r:id="rId2"/>
     <p:sldId id="257" r:id="rId3"/>
-    <p:sldId id="258" r:id="rId4"/>
-    <p:sldId id="259" r:id="rId5"/>
-    <p:sldId id="261" r:id="rId6"/>
-    <p:sldId id="260" r:id="rId7"/>
-    <p:sldId id="262" r:id="rId8"/>
-    <p:sldId id="263" r:id="rId9"/>
-    <p:sldId id="264" r:id="rId10"/>
+    <p:sldId id="265" r:id="rId4"/>
+    <p:sldId id="258" r:id="rId5"/>
+    <p:sldId id="259" r:id="rId6"/>
+    <p:sldId id="261" r:id="rId7"/>
+    <p:sldId id="260" r:id="rId8"/>
+    <p:sldId id="262" r:id="rId9"/>
+    <p:sldId id="263" r:id="rId10"/>
+    <p:sldId id="264" r:id="rId11"/>
   </p:sldIdLst>
   <p:sldSz cx="12192000" cy="6858000"/>
   <p:notesSz cx="6858000" cy="9144000"/>
@@ -170,7 +171,7 @@
           <a:noFill/>
           <a:extLst>
             <a:ext uri="{909E8E84-426E-40dd-AFC4-6F175D3DCCD1}">
-              <a14:hiddenFill xmlns="" xmlns:a14="http://schemas.microsoft.com/office/drawing/2010/main">
+              <a14:hiddenFill xmlns:a14="http://schemas.microsoft.com/office/drawing/2010/main" xmlns="">
                 <a:solidFill>
                   <a:srgbClr val="FFFFFF"/>
                 </a:solidFill>
@@ -230,7 +231,7 @@
             </a:ln>
             <a:extLst>
               <a:ext uri="{91240B29-F687-4f45-9708-019B960494DF}">
-                <a14:hiddenLine xmlns="" xmlns:a14="http://schemas.microsoft.com/office/drawing/2010/main" w="9525">
+                <a14:hiddenLine xmlns:a14="http://schemas.microsoft.com/office/drawing/2010/main" xmlns="" w="9525">
                   <a:solidFill>
                     <a:srgbClr val="000000"/>
                   </a:solidFill>
@@ -320,7 +321,7 @@
             </a:ln>
             <a:extLst>
               <a:ext uri="{91240B29-F687-4f45-9708-019B960494DF}">
-                <a14:hiddenLine xmlns="" xmlns:a14="http://schemas.microsoft.com/office/drawing/2010/main" w="9525">
+                <a14:hiddenLine xmlns:a14="http://schemas.microsoft.com/office/drawing/2010/main" xmlns="" w="9525">
                   <a:solidFill>
                     <a:srgbClr val="000000"/>
                   </a:solidFill>
@@ -410,7 +411,7 @@
             </a:ln>
             <a:extLst>
               <a:ext uri="{91240B29-F687-4f45-9708-019B960494DF}">
-                <a14:hiddenLine xmlns="" xmlns:a14="http://schemas.microsoft.com/office/drawing/2010/main" w="9525">
+                <a14:hiddenLine xmlns:a14="http://schemas.microsoft.com/office/drawing/2010/main" xmlns="" w="9525">
                   <a:solidFill>
                     <a:srgbClr val="000000"/>
                   </a:solidFill>
@@ -444,7 +445,7 @@
             </a:ln>
             <a:extLst>
               <a:ext uri="{91240B29-F687-4f45-9708-019B960494DF}">
-                <a14:hiddenLine xmlns="" xmlns:a14="http://schemas.microsoft.com/office/drawing/2010/main" w="9525">
+                <a14:hiddenLine xmlns:a14="http://schemas.microsoft.com/office/drawing/2010/main" xmlns="" w="9525">
                   <a:solidFill>
                     <a:srgbClr val="000000"/>
                   </a:solidFill>
@@ -534,7 +535,7 @@
             </a:ln>
             <a:extLst>
               <a:ext uri="{91240B29-F687-4f45-9708-019B960494DF}">
-                <a14:hiddenLine xmlns="" xmlns:a14="http://schemas.microsoft.com/office/drawing/2010/main" w="9525">
+                <a14:hiddenLine xmlns:a14="http://schemas.microsoft.com/office/drawing/2010/main" xmlns="" w="9525">
                   <a:solidFill>
                     <a:srgbClr val="000000"/>
                   </a:solidFill>
@@ -596,7 +597,7 @@
             </a:ln>
             <a:extLst>
               <a:ext uri="{91240B29-F687-4f45-9708-019B960494DF}">
-                <a14:hiddenLine xmlns="" xmlns:a14="http://schemas.microsoft.com/office/drawing/2010/main" w="9525">
+                <a14:hiddenLine xmlns:a14="http://schemas.microsoft.com/office/drawing/2010/main" xmlns="" w="9525">
                   <a:solidFill>
                     <a:srgbClr val="000000"/>
                   </a:solidFill>
@@ -658,7 +659,7 @@
             </a:ln>
             <a:extLst>
               <a:ext uri="{91240B29-F687-4f45-9708-019B960494DF}">
-                <a14:hiddenLine xmlns="" xmlns:a14="http://schemas.microsoft.com/office/drawing/2010/main" w="9525">
+                <a14:hiddenLine xmlns:a14="http://schemas.microsoft.com/office/drawing/2010/main" xmlns="" w="9525">
                   <a:solidFill>
                     <a:srgbClr val="000000"/>
                   </a:solidFill>
@@ -748,7 +749,7 @@
             </a:ln>
             <a:extLst>
               <a:ext uri="{91240B29-F687-4f45-9708-019B960494DF}">
-                <a14:hiddenLine xmlns="" xmlns:a14="http://schemas.microsoft.com/office/drawing/2010/main" w="9525">
+                <a14:hiddenLine xmlns:a14="http://schemas.microsoft.com/office/drawing/2010/main" xmlns="" w="9525">
                   <a:solidFill>
                     <a:srgbClr val="000000"/>
                   </a:solidFill>
@@ -810,7 +811,7 @@
             </a:ln>
             <a:extLst>
               <a:ext uri="{91240B29-F687-4f45-9708-019B960494DF}">
-                <a14:hiddenLine xmlns="" xmlns:a14="http://schemas.microsoft.com/office/drawing/2010/main" w="9525">
+                <a14:hiddenLine xmlns:a14="http://schemas.microsoft.com/office/drawing/2010/main" xmlns="" w="9525">
                   <a:solidFill>
                     <a:srgbClr val="000000"/>
                   </a:solidFill>
@@ -872,7 +873,7 @@
             </a:ln>
             <a:extLst>
               <a:ext uri="{91240B29-F687-4f45-9708-019B960494DF}">
-                <a14:hiddenLine xmlns="" xmlns:a14="http://schemas.microsoft.com/office/drawing/2010/main" w="9525">
+                <a14:hiddenLine xmlns:a14="http://schemas.microsoft.com/office/drawing/2010/main" xmlns="" w="9525">
                   <a:solidFill>
                     <a:srgbClr val="000000"/>
                   </a:solidFill>
@@ -962,7 +963,7 @@
             </a:ln>
             <a:extLst>
               <a:ext uri="{91240B29-F687-4f45-9708-019B960494DF}">
-                <a14:hiddenLine xmlns="" xmlns:a14="http://schemas.microsoft.com/office/drawing/2010/main" w="9525">
+                <a14:hiddenLine xmlns:a14="http://schemas.microsoft.com/office/drawing/2010/main" xmlns="" w="9525">
                   <a:solidFill>
                     <a:srgbClr val="000000"/>
                   </a:solidFill>
@@ -1052,7 +1053,7 @@
             </a:ln>
             <a:extLst>
               <a:ext uri="{91240B29-F687-4f45-9708-019B960494DF}">
-                <a14:hiddenLine xmlns="" xmlns:a14="http://schemas.microsoft.com/office/drawing/2010/main" w="9525">
+                <a14:hiddenLine xmlns:a14="http://schemas.microsoft.com/office/drawing/2010/main" xmlns="" w="9525">
                   <a:solidFill>
                     <a:srgbClr val="000000"/>
                   </a:solidFill>
@@ -1114,7 +1115,7 @@
             </a:ln>
             <a:extLst>
               <a:ext uri="{91240B29-F687-4f45-9708-019B960494DF}">
-                <a14:hiddenLine xmlns="" xmlns:a14="http://schemas.microsoft.com/office/drawing/2010/main" w="9525">
+                <a14:hiddenLine xmlns:a14="http://schemas.microsoft.com/office/drawing/2010/main" xmlns="" w="9525">
                   <a:solidFill>
                     <a:srgbClr val="000000"/>
                   </a:solidFill>
@@ -1224,7 +1225,7 @@
             </a:ln>
             <a:extLst>
               <a:ext uri="{91240B29-F687-4f45-9708-019B960494DF}">
-                <a14:hiddenLine xmlns="" xmlns:a14="http://schemas.microsoft.com/office/drawing/2010/main" w="9525">
+                <a14:hiddenLine xmlns:a14="http://schemas.microsoft.com/office/drawing/2010/main" xmlns="" w="9525">
                   <a:solidFill>
                     <a:srgbClr val="000000"/>
                   </a:solidFill>
@@ -1286,7 +1287,7 @@
             </a:ln>
             <a:extLst>
               <a:ext uri="{91240B29-F687-4f45-9708-019B960494DF}">
-                <a14:hiddenLine xmlns="" xmlns:a14="http://schemas.microsoft.com/office/drawing/2010/main" w="9525">
+                <a14:hiddenLine xmlns:a14="http://schemas.microsoft.com/office/drawing/2010/main" xmlns="" w="9525">
                   <a:solidFill>
                     <a:srgbClr val="000000"/>
                   </a:solidFill>
@@ -1376,7 +1377,7 @@
             </a:ln>
             <a:extLst>
               <a:ext uri="{91240B29-F687-4f45-9708-019B960494DF}">
-                <a14:hiddenLine xmlns="" xmlns:a14="http://schemas.microsoft.com/office/drawing/2010/main" w="9525">
+                <a14:hiddenLine xmlns:a14="http://schemas.microsoft.com/office/drawing/2010/main" xmlns="" w="9525">
                   <a:solidFill>
                     <a:srgbClr val="000000"/>
                   </a:solidFill>
@@ -1466,7 +1467,7 @@
             </a:ln>
             <a:extLst>
               <a:ext uri="{91240B29-F687-4f45-9708-019B960494DF}">
-                <a14:hiddenLine xmlns="" xmlns:a14="http://schemas.microsoft.com/office/drawing/2010/main" w="9525">
+                <a14:hiddenLine xmlns:a14="http://schemas.microsoft.com/office/drawing/2010/main" xmlns="" w="9525">
                   <a:solidFill>
                     <a:srgbClr val="000000"/>
                   </a:solidFill>
@@ -1528,7 +1529,7 @@
             </a:ln>
             <a:extLst>
               <a:ext uri="{91240B29-F687-4f45-9708-019B960494DF}">
-                <a14:hiddenLine xmlns="" xmlns:a14="http://schemas.microsoft.com/office/drawing/2010/main" w="9525">
+                <a14:hiddenLine xmlns:a14="http://schemas.microsoft.com/office/drawing/2010/main" xmlns="" w="9525">
                   <a:solidFill>
                     <a:srgbClr val="000000"/>
                   </a:solidFill>
@@ -1618,7 +1619,7 @@
             </a:ln>
             <a:extLst>
               <a:ext uri="{91240B29-F687-4f45-9708-019B960494DF}">
-                <a14:hiddenLine xmlns="" xmlns:a14="http://schemas.microsoft.com/office/drawing/2010/main" w="9525">
+                <a14:hiddenLine xmlns:a14="http://schemas.microsoft.com/office/drawing/2010/main" xmlns="" w="9525">
                   <a:solidFill>
                     <a:srgbClr val="000000"/>
                   </a:solidFill>
@@ -1708,7 +1709,7 @@
             </a:ln>
             <a:extLst>
               <a:ext uri="{91240B29-F687-4f45-9708-019B960494DF}">
-                <a14:hiddenLine xmlns="" xmlns:a14="http://schemas.microsoft.com/office/drawing/2010/main" w="9525">
+                <a14:hiddenLine xmlns:a14="http://schemas.microsoft.com/office/drawing/2010/main" xmlns="" w="9525">
                   <a:solidFill>
                     <a:srgbClr val="000000"/>
                   </a:solidFill>
@@ -1764,7 +1765,7 @@
             </a:ln>
             <a:extLst>
               <a:ext uri="{91240B29-F687-4f45-9708-019B960494DF}">
-                <a14:hiddenLine xmlns="" xmlns:a14="http://schemas.microsoft.com/office/drawing/2010/main" w="9525">
+                <a14:hiddenLine xmlns:a14="http://schemas.microsoft.com/office/drawing/2010/main" xmlns="" w="9525">
                   <a:solidFill>
                     <a:srgbClr val="000000"/>
                   </a:solidFill>
@@ -1854,7 +1855,7 @@
             </a:ln>
             <a:extLst>
               <a:ext uri="{91240B29-F687-4f45-9708-019B960494DF}">
-                <a14:hiddenLine xmlns="" xmlns:a14="http://schemas.microsoft.com/office/drawing/2010/main" w="9525">
+                <a14:hiddenLine xmlns:a14="http://schemas.microsoft.com/office/drawing/2010/main" xmlns="" w="9525">
                   <a:solidFill>
                     <a:srgbClr val="000000"/>
                   </a:solidFill>
@@ -1910,7 +1911,7 @@
             </a:ln>
             <a:extLst>
               <a:ext uri="{91240B29-F687-4f45-9708-019B960494DF}">
-                <a14:hiddenLine xmlns="" xmlns:a14="http://schemas.microsoft.com/office/drawing/2010/main" w="9525">
+                <a14:hiddenLine xmlns:a14="http://schemas.microsoft.com/office/drawing/2010/main" xmlns="" w="9525">
                   <a:solidFill>
                     <a:srgbClr val="000000"/>
                   </a:solidFill>
@@ -2000,7 +2001,7 @@
             </a:ln>
             <a:extLst>
               <a:ext uri="{91240B29-F687-4f45-9708-019B960494DF}">
-                <a14:hiddenLine xmlns="" xmlns:a14="http://schemas.microsoft.com/office/drawing/2010/main" w="9525">
+                <a14:hiddenLine xmlns:a14="http://schemas.microsoft.com/office/drawing/2010/main" xmlns="" w="9525">
                   <a:solidFill>
                     <a:srgbClr val="000000"/>
                   </a:solidFill>
@@ -2068,7 +2069,7 @@
             </a:ln>
             <a:extLst>
               <a:ext uri="{91240B29-F687-4f45-9708-019B960494DF}">
-                <a14:hiddenLine xmlns="" xmlns:a14="http://schemas.microsoft.com/office/drawing/2010/main" w="9525">
+                <a14:hiddenLine xmlns:a14="http://schemas.microsoft.com/office/drawing/2010/main" xmlns="" w="9525">
                   <a:solidFill>
                     <a:srgbClr val="000000"/>
                   </a:solidFill>
@@ -2158,7 +2159,7 @@
             </a:ln>
             <a:extLst>
               <a:ext uri="{91240B29-F687-4f45-9708-019B960494DF}">
-                <a14:hiddenLine xmlns="" xmlns:a14="http://schemas.microsoft.com/office/drawing/2010/main" w="9525">
+                <a14:hiddenLine xmlns:a14="http://schemas.microsoft.com/office/drawing/2010/main" xmlns="" w="9525">
                   <a:solidFill>
                     <a:srgbClr val="000000"/>
                   </a:solidFill>
@@ -2226,7 +2227,7 @@
             </a:ln>
             <a:extLst>
               <a:ext uri="{91240B29-F687-4f45-9708-019B960494DF}">
-                <a14:hiddenLine xmlns="" xmlns:a14="http://schemas.microsoft.com/office/drawing/2010/main" w="9525">
+                <a14:hiddenLine xmlns:a14="http://schemas.microsoft.com/office/drawing/2010/main" xmlns="" w="9525">
                   <a:solidFill>
                     <a:srgbClr val="000000"/>
                   </a:solidFill>
@@ -2316,7 +2317,7 @@
             </a:ln>
             <a:extLst>
               <a:ext uri="{91240B29-F687-4f45-9708-019B960494DF}">
-                <a14:hiddenLine xmlns="" xmlns:a14="http://schemas.microsoft.com/office/drawing/2010/main" w="9525">
+                <a14:hiddenLine xmlns:a14="http://schemas.microsoft.com/office/drawing/2010/main" xmlns="" w="9525">
                   <a:solidFill>
                     <a:srgbClr val="000000"/>
                   </a:solidFill>
@@ -2350,7 +2351,7 @@
             </a:ln>
             <a:extLst>
               <a:ext uri="{91240B29-F687-4f45-9708-019B960494DF}">
-                <a14:hiddenLine xmlns="" xmlns:a14="http://schemas.microsoft.com/office/drawing/2010/main" w="9525">
+                <a14:hiddenLine xmlns:a14="http://schemas.microsoft.com/office/drawing/2010/main" xmlns="" w="9525">
                   <a:solidFill>
                     <a:srgbClr val="000000"/>
                   </a:solidFill>
@@ -2440,7 +2441,7 @@
             </a:ln>
             <a:extLst>
               <a:ext uri="{91240B29-F687-4f45-9708-019B960494DF}">
-                <a14:hiddenLine xmlns="" xmlns:a14="http://schemas.microsoft.com/office/drawing/2010/main" w="9525">
+                <a14:hiddenLine xmlns:a14="http://schemas.microsoft.com/office/drawing/2010/main" xmlns="" w="9525">
                   <a:solidFill>
                     <a:srgbClr val="000000"/>
                   </a:solidFill>
@@ -2502,7 +2503,7 @@
             </a:ln>
             <a:extLst>
               <a:ext uri="{91240B29-F687-4f45-9708-019B960494DF}">
-                <a14:hiddenLine xmlns="" xmlns:a14="http://schemas.microsoft.com/office/drawing/2010/main" w="9525">
+                <a14:hiddenLine xmlns:a14="http://schemas.microsoft.com/office/drawing/2010/main" xmlns="" w="9525">
                   <a:solidFill>
                     <a:srgbClr val="000000"/>
                   </a:solidFill>
@@ -2564,7 +2565,7 @@
             </a:ln>
             <a:extLst>
               <a:ext uri="{91240B29-F687-4f45-9708-019B960494DF}">
-                <a14:hiddenLine xmlns="" xmlns:a14="http://schemas.microsoft.com/office/drawing/2010/main" w="9525">
+                <a14:hiddenLine xmlns:a14="http://schemas.microsoft.com/office/drawing/2010/main" xmlns="" w="9525">
                   <a:solidFill>
                     <a:srgbClr val="000000"/>
                   </a:solidFill>
@@ -2654,7 +2655,7 @@
             </a:ln>
             <a:extLst>
               <a:ext uri="{91240B29-F687-4f45-9708-019B960494DF}">
-                <a14:hiddenLine xmlns="" xmlns:a14="http://schemas.microsoft.com/office/drawing/2010/main" w="9525">
+                <a14:hiddenLine xmlns:a14="http://schemas.microsoft.com/office/drawing/2010/main" xmlns="" w="9525">
                   <a:solidFill>
                     <a:srgbClr val="000000"/>
                   </a:solidFill>
@@ -2722,7 +2723,7 @@
             </a:ln>
             <a:extLst>
               <a:ext uri="{91240B29-F687-4f45-9708-019B960494DF}">
-                <a14:hiddenLine xmlns="" xmlns:a14="http://schemas.microsoft.com/office/drawing/2010/main" w="9525">
+                <a14:hiddenLine xmlns:a14="http://schemas.microsoft.com/office/drawing/2010/main" xmlns="" w="9525">
                   <a:solidFill>
                     <a:srgbClr val="000000"/>
                   </a:solidFill>
@@ -2784,7 +2785,7 @@
             </a:ln>
             <a:extLst>
               <a:ext uri="{91240B29-F687-4f45-9708-019B960494DF}">
-                <a14:hiddenLine xmlns="" xmlns:a14="http://schemas.microsoft.com/office/drawing/2010/main" w="9525">
+                <a14:hiddenLine xmlns:a14="http://schemas.microsoft.com/office/drawing/2010/main" xmlns="" w="9525">
                   <a:solidFill>
                     <a:srgbClr val="000000"/>
                   </a:solidFill>
@@ -2874,7 +2875,7 @@
             </a:ln>
             <a:extLst>
               <a:ext uri="{91240B29-F687-4f45-9708-019B960494DF}">
-                <a14:hiddenLine xmlns="" xmlns:a14="http://schemas.microsoft.com/office/drawing/2010/main" w="9525">
+                <a14:hiddenLine xmlns:a14="http://schemas.microsoft.com/office/drawing/2010/main" xmlns="" w="9525">
                   <a:solidFill>
                     <a:srgbClr val="000000"/>
                   </a:solidFill>
@@ -2936,7 +2937,7 @@
             </a:ln>
             <a:extLst>
               <a:ext uri="{91240B29-F687-4f45-9708-019B960494DF}">
-                <a14:hiddenLine xmlns="" xmlns:a14="http://schemas.microsoft.com/office/drawing/2010/main" w="9525">
+                <a14:hiddenLine xmlns:a14="http://schemas.microsoft.com/office/drawing/2010/main" xmlns="" w="9525">
                   <a:solidFill>
                     <a:srgbClr val="000000"/>
                   </a:solidFill>
@@ -3026,7 +3027,7 @@
             </a:ln>
             <a:extLst>
               <a:ext uri="{91240B29-F687-4f45-9708-019B960494DF}">
-                <a14:hiddenLine xmlns="" xmlns:a14="http://schemas.microsoft.com/office/drawing/2010/main" w="9525">
+                <a14:hiddenLine xmlns:a14="http://schemas.microsoft.com/office/drawing/2010/main" xmlns="" w="9525">
                   <a:solidFill>
                     <a:srgbClr val="000000"/>
                   </a:solidFill>
@@ -3088,7 +3089,7 @@
             </a:ln>
             <a:extLst>
               <a:ext uri="{91240B29-F687-4f45-9708-019B960494DF}">
-                <a14:hiddenLine xmlns="" xmlns:a14="http://schemas.microsoft.com/office/drawing/2010/main" w="9525">
+                <a14:hiddenLine xmlns:a14="http://schemas.microsoft.com/office/drawing/2010/main" xmlns="" w="9525">
                   <a:solidFill>
                     <a:srgbClr val="000000"/>
                   </a:solidFill>
@@ -3178,7 +3179,7 @@
             </a:ln>
             <a:extLst>
               <a:ext uri="{91240B29-F687-4f45-9708-019B960494DF}">
-                <a14:hiddenLine xmlns="" xmlns:a14="http://schemas.microsoft.com/office/drawing/2010/main" w="9525">
+                <a14:hiddenLine xmlns:a14="http://schemas.microsoft.com/office/drawing/2010/main" xmlns="" w="9525">
                   <a:solidFill>
                     <a:srgbClr val="000000"/>
                   </a:solidFill>
@@ -3212,7 +3213,7 @@
             </a:ln>
             <a:extLst>
               <a:ext uri="{91240B29-F687-4f45-9708-019B960494DF}">
-                <a14:hiddenLine xmlns="" xmlns:a14="http://schemas.microsoft.com/office/drawing/2010/main" w="9525">
+                <a14:hiddenLine xmlns:a14="http://schemas.microsoft.com/office/drawing/2010/main" xmlns="" w="9525">
                   <a:solidFill>
                     <a:srgbClr val="000000"/>
                   </a:solidFill>
@@ -3277,7 +3278,7 @@
             </a:ln>
             <a:extLst>
               <a:ext uri="{91240B29-F687-4f45-9708-019B960494DF}">
-                <a14:hiddenLine xmlns="" xmlns:a14="http://schemas.microsoft.com/office/drawing/2010/main" w="9525">
+                <a14:hiddenLine xmlns:a14="http://schemas.microsoft.com/office/drawing/2010/main" xmlns="" w="9525">
                   <a:solidFill>
                     <a:srgbClr val="000000"/>
                   </a:solidFill>
@@ -3367,7 +3368,7 @@
             </a:ln>
             <a:extLst>
               <a:ext uri="{91240B29-F687-4f45-9708-019B960494DF}">
-                <a14:hiddenLine xmlns="" xmlns:a14="http://schemas.microsoft.com/office/drawing/2010/main" w="9525">
+                <a14:hiddenLine xmlns:a14="http://schemas.microsoft.com/office/drawing/2010/main" xmlns="" w="9525">
                   <a:solidFill>
                     <a:srgbClr val="000000"/>
                   </a:solidFill>
@@ -3429,7 +3430,7 @@
             </a:ln>
             <a:extLst>
               <a:ext uri="{91240B29-F687-4f45-9708-019B960494DF}">
-                <a14:hiddenLine xmlns="" xmlns:a14="http://schemas.microsoft.com/office/drawing/2010/main" w="9525">
+                <a14:hiddenLine xmlns:a14="http://schemas.microsoft.com/office/drawing/2010/main" xmlns="" w="9525">
                   <a:solidFill>
                     <a:srgbClr val="000000"/>
                   </a:solidFill>
@@ -3519,7 +3520,7 @@
             </a:ln>
             <a:extLst>
               <a:ext uri="{91240B29-F687-4f45-9708-019B960494DF}">
-                <a14:hiddenLine xmlns="" xmlns:a14="http://schemas.microsoft.com/office/drawing/2010/main" w="9525">
+                <a14:hiddenLine xmlns:a14="http://schemas.microsoft.com/office/drawing/2010/main" xmlns="" w="9525">
                   <a:solidFill>
                     <a:srgbClr val="000000"/>
                   </a:solidFill>
@@ -3609,7 +3610,7 @@
             </a:ln>
             <a:extLst>
               <a:ext uri="{91240B29-F687-4f45-9708-019B960494DF}">
-                <a14:hiddenLine xmlns="" xmlns:a14="http://schemas.microsoft.com/office/drawing/2010/main" w="9525">
+                <a14:hiddenLine xmlns:a14="http://schemas.microsoft.com/office/drawing/2010/main" xmlns="" w="9525">
                   <a:solidFill>
                     <a:srgbClr val="000000"/>
                   </a:solidFill>
@@ -3674,7 +3675,7 @@
             </a:ln>
             <a:extLst>
               <a:ext uri="{91240B29-F687-4f45-9708-019B960494DF}">
-                <a14:hiddenLine xmlns="" xmlns:a14="http://schemas.microsoft.com/office/drawing/2010/main" w="9525">
+                <a14:hiddenLine xmlns:a14="http://schemas.microsoft.com/office/drawing/2010/main" xmlns="" w="9525">
                   <a:solidFill>
                     <a:srgbClr val="000000"/>
                   </a:solidFill>
@@ -3736,7 +3737,7 @@
             </a:ln>
             <a:extLst>
               <a:ext uri="{91240B29-F687-4f45-9708-019B960494DF}">
-                <a14:hiddenLine xmlns="" xmlns:a14="http://schemas.microsoft.com/office/drawing/2010/main" w="9525">
+                <a14:hiddenLine xmlns:a14="http://schemas.microsoft.com/office/drawing/2010/main" xmlns="" w="9525">
                   <a:solidFill>
                     <a:srgbClr val="000000"/>
                   </a:solidFill>
@@ -3826,7 +3827,7 @@
             </a:ln>
             <a:extLst>
               <a:ext uri="{91240B29-F687-4f45-9708-019B960494DF}">
-                <a14:hiddenLine xmlns="" xmlns:a14="http://schemas.microsoft.com/office/drawing/2010/main" w="9525">
+                <a14:hiddenLine xmlns:a14="http://schemas.microsoft.com/office/drawing/2010/main" xmlns="" w="9525">
                   <a:solidFill>
                     <a:srgbClr val="000000"/>
                   </a:solidFill>
@@ -3916,7 +3917,7 @@
             </a:ln>
             <a:extLst>
               <a:ext uri="{91240B29-F687-4f45-9708-019B960494DF}">
-                <a14:hiddenLine xmlns="" xmlns:a14="http://schemas.microsoft.com/office/drawing/2010/main" w="9525">
+                <a14:hiddenLine xmlns:a14="http://schemas.microsoft.com/office/drawing/2010/main" xmlns="" w="9525">
                   <a:solidFill>
                     <a:srgbClr val="000000"/>
                   </a:solidFill>
@@ -3978,7 +3979,7 @@
             </a:ln>
             <a:extLst>
               <a:ext uri="{91240B29-F687-4f45-9708-019B960494DF}">
-                <a14:hiddenLine xmlns="" xmlns:a14="http://schemas.microsoft.com/office/drawing/2010/main" w="9525">
+                <a14:hiddenLine xmlns:a14="http://schemas.microsoft.com/office/drawing/2010/main" xmlns="" w="9525">
                   <a:solidFill>
                     <a:srgbClr val="000000"/>
                   </a:solidFill>
@@ -4098,7 +4099,7 @@
             </a:ln>
             <a:extLst>
               <a:ext uri="{91240B29-F687-4f45-9708-019B960494DF}">
-                <a14:hiddenLine xmlns="" xmlns:a14="http://schemas.microsoft.com/office/drawing/2010/main" w="9525">
+                <a14:hiddenLine xmlns:a14="http://schemas.microsoft.com/office/drawing/2010/main" xmlns="" w="9525">
                   <a:solidFill>
                     <a:srgbClr val="000000"/>
                   </a:solidFill>
@@ -4166,7 +4167,7 @@
             </a:ln>
             <a:extLst>
               <a:ext uri="{91240B29-F687-4f45-9708-019B960494DF}">
-                <a14:hiddenLine xmlns="" xmlns:a14="http://schemas.microsoft.com/office/drawing/2010/main" w="9525">
+                <a14:hiddenLine xmlns:a14="http://schemas.microsoft.com/office/drawing/2010/main" xmlns="" w="9525">
                   <a:solidFill>
                     <a:srgbClr val="000000"/>
                   </a:solidFill>
@@ -4256,7 +4257,7 @@
             </a:ln>
             <a:extLst>
               <a:ext uri="{91240B29-F687-4f45-9708-019B960494DF}">
-                <a14:hiddenLine xmlns="" xmlns:a14="http://schemas.microsoft.com/office/drawing/2010/main" w="9525">
+                <a14:hiddenLine xmlns:a14="http://schemas.microsoft.com/office/drawing/2010/main" xmlns="" w="9525">
                   <a:solidFill>
                     <a:srgbClr val="000000"/>
                   </a:solidFill>
@@ -4396,7 +4397,7 @@
           <a:p>
             <a:fld id="{48A87A34-81AB-432B-8DAE-1953F412C126}" type="datetimeFigureOut">
               <a:rPr lang="en-US" dirty="0"/>
-              <a:t>5/2/2026</a:t>
+              <a:t>5/3/2026</a:t>
             </a:fld>
             <a:endParaRPr lang="en-US" dirty="0"/>
           </a:p>
@@ -4658,7 +4659,7 @@
           <a:p>
             <a:fld id="{48A87A34-81AB-432B-8DAE-1953F412C126}" type="datetimeFigureOut">
               <a:rPr lang="en-US" dirty="0"/>
-              <a:t>5/2/2026</a:t>
+              <a:t>5/3/2026</a:t>
             </a:fld>
             <a:endParaRPr lang="en-US" dirty="0"/>
           </a:p>
@@ -4849,7 +4850,7 @@
           <a:p>
             <a:fld id="{48A87A34-81AB-432B-8DAE-1953F412C126}" type="datetimeFigureOut">
               <a:rPr lang="en-US" dirty="0"/>
-              <a:t>5/2/2026</a:t>
+              <a:t>5/3/2026</a:t>
             </a:fld>
             <a:endParaRPr lang="en-US" dirty="0"/>
           </a:p>
@@ -5107,7 +5108,7 @@
           <a:p>
             <a:fld id="{48A87A34-81AB-432B-8DAE-1953F412C126}" type="datetimeFigureOut">
               <a:rPr lang="en-US" dirty="0"/>
-              <a:t>5/2/2026</a:t>
+              <a:t>5/3/2026</a:t>
             </a:fld>
             <a:endParaRPr lang="en-US" dirty="0"/>
           </a:p>
@@ -5536,7 +5537,7 @@
           <a:p>
             <a:fld id="{48A87A34-81AB-432B-8DAE-1953F412C126}" type="datetimeFigureOut">
               <a:rPr lang="en-US" dirty="0"/>
-              <a:t>5/2/2026</a:t>
+              <a:t>5/3/2026</a:t>
             </a:fld>
             <a:endParaRPr lang="en-US" dirty="0"/>
           </a:p>
@@ -6077,7 +6078,7 @@
           <a:p>
             <a:fld id="{48A87A34-81AB-432B-8DAE-1953F412C126}" type="datetimeFigureOut">
               <a:rPr lang="en-US" dirty="0"/>
-              <a:t>5/2/2026</a:t>
+              <a:t>5/3/2026</a:t>
             </a:fld>
             <a:endParaRPr lang="en-US" dirty="0"/>
           </a:p>
@@ -6792,7 +6793,7 @@
           <a:p>
             <a:fld id="{48A87A34-81AB-432B-8DAE-1953F412C126}" type="datetimeFigureOut">
               <a:rPr lang="en-US" dirty="0"/>
-              <a:t>5/2/2026</a:t>
+              <a:t>5/3/2026</a:t>
             </a:fld>
             <a:endParaRPr lang="en-US" dirty="0"/>
           </a:p>
@@ -6957,7 +6958,7 @@
           <a:p>
             <a:fld id="{48A87A34-81AB-432B-8DAE-1953F412C126}" type="datetimeFigureOut">
               <a:rPr lang="en-US" dirty="0"/>
-              <a:t>5/2/2026</a:t>
+              <a:t>5/3/2026</a:t>
             </a:fld>
             <a:endParaRPr lang="en-US" dirty="0"/>
           </a:p>
@@ -7132,7 +7133,7 @@
           <a:p>
             <a:fld id="{48A87A34-81AB-432B-8DAE-1953F412C126}" type="datetimeFigureOut">
               <a:rPr lang="en-US" dirty="0"/>
-              <a:t>5/2/2026</a:t>
+              <a:t>5/3/2026</a:t>
             </a:fld>
             <a:endParaRPr lang="en-US" dirty="0"/>
           </a:p>
@@ -7297,7 +7298,7 @@
           <a:p>
             <a:fld id="{48A87A34-81AB-432B-8DAE-1953F412C126}" type="datetimeFigureOut">
               <a:rPr lang="en-US" dirty="0"/>
-              <a:t>5/2/2026</a:t>
+              <a:t>5/3/2026</a:t>
             </a:fld>
             <a:endParaRPr lang="en-US" dirty="0"/>
           </a:p>
@@ -7542,7 +7543,7 @@
           <a:p>
             <a:fld id="{48A87A34-81AB-432B-8DAE-1953F412C126}" type="datetimeFigureOut">
               <a:rPr lang="en-US" dirty="0"/>
-              <a:t>5/2/2026</a:t>
+              <a:t>5/3/2026</a:t>
             </a:fld>
             <a:endParaRPr lang="en-US" dirty="0"/>
           </a:p>
@@ -7769,7 +7770,7 @@
           <a:p>
             <a:fld id="{48A87A34-81AB-432B-8DAE-1953F412C126}" type="datetimeFigureOut">
               <a:rPr lang="en-US" dirty="0"/>
-              <a:t>5/2/2026</a:t>
+              <a:t>5/3/2026</a:t>
             </a:fld>
             <a:endParaRPr lang="en-US" dirty="0"/>
           </a:p>
@@ -8145,7 +8146,7 @@
           <a:p>
             <a:fld id="{48A87A34-81AB-432B-8DAE-1953F412C126}" type="datetimeFigureOut">
               <a:rPr lang="en-US" dirty="0"/>
-              <a:t>5/2/2026</a:t>
+              <a:t>5/3/2026</a:t>
             </a:fld>
             <a:endParaRPr lang="en-US" dirty="0"/>
           </a:p>
@@ -8258,7 +8259,7 @@
           <a:p>
             <a:fld id="{48A87A34-81AB-432B-8DAE-1953F412C126}" type="datetimeFigureOut">
               <a:rPr lang="en-US" dirty="0"/>
-              <a:t>5/2/2026</a:t>
+              <a:t>5/3/2026</a:t>
             </a:fld>
             <a:endParaRPr lang="en-US" dirty="0"/>
           </a:p>
@@ -8348,7 +8349,7 @@
           <a:p>
             <a:fld id="{48A87A34-81AB-432B-8DAE-1953F412C126}" type="datetimeFigureOut">
               <a:rPr lang="en-US" dirty="0"/>
-              <a:t>5/2/2026</a:t>
+              <a:t>5/3/2026</a:t>
             </a:fld>
             <a:endParaRPr lang="en-US" dirty="0"/>
           </a:p>
@@ -8592,7 +8593,7 @@
           <a:p>
             <a:fld id="{48A87A34-81AB-432B-8DAE-1953F412C126}" type="datetimeFigureOut">
               <a:rPr lang="en-US" dirty="0"/>
-              <a:t>5/2/2026</a:t>
+              <a:t>5/3/2026</a:t>
             </a:fld>
             <a:endParaRPr lang="en-US" dirty="0"/>
           </a:p>
@@ -8867,7 +8868,7 @@
           <a:p>
             <a:fld id="{48A87A34-81AB-432B-8DAE-1953F412C126}" type="datetimeFigureOut">
               <a:rPr lang="en-US" dirty="0"/>
-              <a:t>5/2/2026</a:t>
+              <a:t>5/3/2026</a:t>
             </a:fld>
             <a:endParaRPr lang="en-US" dirty="0"/>
           </a:p>
@@ -8978,7 +8979,7 @@
           <a:noFill/>
           <a:extLst>
             <a:ext uri="{909E8E84-426E-40dd-AFC4-6F175D3DCCD1}">
-              <a14:hiddenFill xmlns="" xmlns:a14="http://schemas.microsoft.com/office/drawing/2010/main">
+              <a14:hiddenFill xmlns:a14="http://schemas.microsoft.com/office/drawing/2010/main" xmlns="">
                 <a:solidFill>
                   <a:srgbClr val="FFFFFF"/>
                 </a:solidFill>
@@ -9052,7 +9053,7 @@
               </a:ln>
               <a:extLst>
                 <a:ext uri="{91240B29-F687-4f45-9708-019B960494DF}">
-                  <a14:hiddenLine xmlns="" xmlns:a14="http://schemas.microsoft.com/office/drawing/2010/main" w="9525">
+                  <a14:hiddenLine xmlns:a14="http://schemas.microsoft.com/office/drawing/2010/main" xmlns="" w="9525">
                     <a:solidFill>
                       <a:srgbClr val="000000"/>
                     </a:solidFill>
@@ -9142,7 +9143,7 @@
               </a:ln>
               <a:extLst>
                 <a:ext uri="{91240B29-F687-4f45-9708-019B960494DF}">
-                  <a14:hiddenLine xmlns="" xmlns:a14="http://schemas.microsoft.com/office/drawing/2010/main" w="9525">
+                  <a14:hiddenLine xmlns:a14="http://schemas.microsoft.com/office/drawing/2010/main" xmlns="" w="9525">
                     <a:solidFill>
                       <a:srgbClr val="000000"/>
                     </a:solidFill>
@@ -9232,7 +9233,7 @@
               </a:ln>
               <a:extLst>
                 <a:ext uri="{91240B29-F687-4f45-9708-019B960494DF}">
-                  <a14:hiddenLine xmlns="" xmlns:a14="http://schemas.microsoft.com/office/drawing/2010/main" w="9525">
+                  <a14:hiddenLine xmlns:a14="http://schemas.microsoft.com/office/drawing/2010/main" xmlns="" w="9525">
                     <a:solidFill>
                       <a:srgbClr val="000000"/>
                     </a:solidFill>
@@ -9294,7 +9295,7 @@
               </a:ln>
               <a:extLst>
                 <a:ext uri="{91240B29-F687-4f45-9708-019B960494DF}">
-                  <a14:hiddenLine xmlns="" xmlns:a14="http://schemas.microsoft.com/office/drawing/2010/main" w="9525">
+                  <a14:hiddenLine xmlns:a14="http://schemas.microsoft.com/office/drawing/2010/main" xmlns="" w="9525">
                     <a:solidFill>
                       <a:srgbClr val="000000"/>
                     </a:solidFill>
@@ -9384,7 +9385,7 @@
               </a:ln>
               <a:extLst>
                 <a:ext uri="{91240B29-F687-4f45-9708-019B960494DF}">
-                  <a14:hiddenLine xmlns="" xmlns:a14="http://schemas.microsoft.com/office/drawing/2010/main" w="9525">
+                  <a14:hiddenLine xmlns:a14="http://schemas.microsoft.com/office/drawing/2010/main" xmlns="" w="9525">
                     <a:solidFill>
                       <a:srgbClr val="000000"/>
                     </a:solidFill>
@@ -9446,7 +9447,7 @@
               </a:ln>
               <a:extLst>
                 <a:ext uri="{91240B29-F687-4f45-9708-019B960494DF}">
-                  <a14:hiddenLine xmlns="" xmlns:a14="http://schemas.microsoft.com/office/drawing/2010/main" w="9525">
+                  <a14:hiddenLine xmlns:a14="http://schemas.microsoft.com/office/drawing/2010/main" xmlns="" w="9525">
                     <a:solidFill>
                       <a:srgbClr val="000000"/>
                     </a:solidFill>
@@ -9508,7 +9509,7 @@
               </a:ln>
               <a:extLst>
                 <a:ext uri="{91240B29-F687-4f45-9708-019B960494DF}">
-                  <a14:hiddenLine xmlns="" xmlns:a14="http://schemas.microsoft.com/office/drawing/2010/main" w="9525">
+                  <a14:hiddenLine xmlns:a14="http://schemas.microsoft.com/office/drawing/2010/main" xmlns="" w="9525">
                     <a:solidFill>
                       <a:srgbClr val="000000"/>
                     </a:solidFill>
@@ -9598,7 +9599,7 @@
               </a:ln>
               <a:extLst>
                 <a:ext uri="{91240B29-F687-4f45-9708-019B960494DF}">
-                  <a14:hiddenLine xmlns="" xmlns:a14="http://schemas.microsoft.com/office/drawing/2010/main" w="9525">
+                  <a14:hiddenLine xmlns:a14="http://schemas.microsoft.com/office/drawing/2010/main" xmlns="" w="9525">
                     <a:solidFill>
                       <a:srgbClr val="000000"/>
                     </a:solidFill>
@@ -9688,7 +9689,7 @@
               </a:ln>
               <a:extLst>
                 <a:ext uri="{91240B29-F687-4f45-9708-019B960494DF}">
-                  <a14:hiddenLine xmlns="" xmlns:a14="http://schemas.microsoft.com/office/drawing/2010/main" w="9525">
+                  <a14:hiddenLine xmlns:a14="http://schemas.microsoft.com/office/drawing/2010/main" xmlns="" w="9525">
                     <a:solidFill>
                       <a:srgbClr val="000000"/>
                     </a:solidFill>
@@ -9750,7 +9751,7 @@
               </a:ln>
               <a:extLst>
                 <a:ext uri="{91240B29-F687-4f45-9708-019B960494DF}">
-                  <a14:hiddenLine xmlns="" xmlns:a14="http://schemas.microsoft.com/office/drawing/2010/main" w="9525">
+                  <a14:hiddenLine xmlns:a14="http://schemas.microsoft.com/office/drawing/2010/main" xmlns="" w="9525">
                     <a:solidFill>
                       <a:srgbClr val="000000"/>
                     </a:solidFill>
@@ -9860,7 +9861,7 @@
               </a:ln>
               <a:extLst>
                 <a:ext uri="{91240B29-F687-4f45-9708-019B960494DF}">
-                  <a14:hiddenLine xmlns="" xmlns:a14="http://schemas.microsoft.com/office/drawing/2010/main" w="9525">
+                  <a14:hiddenLine xmlns:a14="http://schemas.microsoft.com/office/drawing/2010/main" xmlns="" w="9525">
                     <a:solidFill>
                       <a:srgbClr val="000000"/>
                     </a:solidFill>
@@ -9944,7 +9945,7 @@
               </a:ln>
               <a:extLst>
                 <a:ext uri="{91240B29-F687-4f45-9708-019B960494DF}">
-                  <a14:hiddenLine xmlns="" xmlns:a14="http://schemas.microsoft.com/office/drawing/2010/main" w="9525">
+                  <a14:hiddenLine xmlns:a14="http://schemas.microsoft.com/office/drawing/2010/main" xmlns="" w="9525">
                     <a:solidFill>
                       <a:srgbClr val="000000"/>
                     </a:solidFill>
@@ -10006,7 +10007,7 @@
               </a:ln>
               <a:extLst>
                 <a:ext uri="{91240B29-F687-4f45-9708-019B960494DF}">
-                  <a14:hiddenLine xmlns="" xmlns:a14="http://schemas.microsoft.com/office/drawing/2010/main" w="9525">
+                  <a14:hiddenLine xmlns:a14="http://schemas.microsoft.com/office/drawing/2010/main" xmlns="" w="9525">
                     <a:solidFill>
                       <a:srgbClr val="000000"/>
                     </a:solidFill>
@@ -10068,7 +10069,7 @@
               </a:ln>
               <a:extLst>
                 <a:ext uri="{91240B29-F687-4f45-9708-019B960494DF}">
-                  <a14:hiddenLine xmlns="" xmlns:a14="http://schemas.microsoft.com/office/drawing/2010/main" w="9525">
+                  <a14:hiddenLine xmlns:a14="http://schemas.microsoft.com/office/drawing/2010/main" xmlns="" w="9525">
                     <a:solidFill>
                       <a:srgbClr val="000000"/>
                     </a:solidFill>
@@ -10158,7 +10159,7 @@
               </a:ln>
               <a:extLst>
                 <a:ext uri="{91240B29-F687-4f45-9708-019B960494DF}">
-                  <a14:hiddenLine xmlns="" xmlns:a14="http://schemas.microsoft.com/office/drawing/2010/main" w="9525">
+                  <a14:hiddenLine xmlns:a14="http://schemas.microsoft.com/office/drawing/2010/main" xmlns="" w="9525">
                     <a:solidFill>
                       <a:srgbClr val="000000"/>
                     </a:solidFill>
@@ -10192,7 +10193,7 @@
               </a:ln>
               <a:extLst>
                 <a:ext uri="{91240B29-F687-4f45-9708-019B960494DF}">
-                  <a14:hiddenLine xmlns="" xmlns:a14="http://schemas.microsoft.com/office/drawing/2010/main" w="9525">
+                  <a14:hiddenLine xmlns:a14="http://schemas.microsoft.com/office/drawing/2010/main" xmlns="" w="9525">
                     <a:solidFill>
                       <a:srgbClr val="000000"/>
                     </a:solidFill>
@@ -10257,7 +10258,7 @@
               </a:ln>
               <a:extLst>
                 <a:ext uri="{91240B29-F687-4f45-9708-019B960494DF}">
-                  <a14:hiddenLine xmlns="" xmlns:a14="http://schemas.microsoft.com/office/drawing/2010/main" w="9525">
+                  <a14:hiddenLine xmlns:a14="http://schemas.microsoft.com/office/drawing/2010/main" xmlns="" w="9525">
                     <a:solidFill>
                       <a:srgbClr val="000000"/>
                     </a:solidFill>
@@ -10347,7 +10348,7 @@
               </a:ln>
               <a:extLst>
                 <a:ext uri="{91240B29-F687-4f45-9708-019B960494DF}">
-                  <a14:hiddenLine xmlns="" xmlns:a14="http://schemas.microsoft.com/office/drawing/2010/main" w="9525">
+                  <a14:hiddenLine xmlns:a14="http://schemas.microsoft.com/office/drawing/2010/main" xmlns="" w="9525">
                     <a:solidFill>
                       <a:srgbClr val="000000"/>
                     </a:solidFill>
@@ -10409,7 +10410,7 @@
               </a:ln>
               <a:extLst>
                 <a:ext uri="{91240B29-F687-4f45-9708-019B960494DF}">
-                  <a14:hiddenLine xmlns="" xmlns:a14="http://schemas.microsoft.com/office/drawing/2010/main" w="9525">
+                  <a14:hiddenLine xmlns:a14="http://schemas.microsoft.com/office/drawing/2010/main" xmlns="" w="9525">
                     <a:solidFill>
                       <a:srgbClr val="000000"/>
                     </a:solidFill>
@@ -10499,7 +10500,7 @@
               </a:ln>
               <a:extLst>
                 <a:ext uri="{91240B29-F687-4f45-9708-019B960494DF}">
-                  <a14:hiddenLine xmlns="" xmlns:a14="http://schemas.microsoft.com/office/drawing/2010/main" w="9525">
+                  <a14:hiddenLine xmlns:a14="http://schemas.microsoft.com/office/drawing/2010/main" xmlns="" w="9525">
                     <a:solidFill>
                       <a:srgbClr val="000000"/>
                     </a:solidFill>
@@ -10564,7 +10565,7 @@
               </a:ln>
               <a:extLst>
                 <a:ext uri="{91240B29-F687-4f45-9708-019B960494DF}">
-                  <a14:hiddenLine xmlns="" xmlns:a14="http://schemas.microsoft.com/office/drawing/2010/main" w="9525">
+                  <a14:hiddenLine xmlns:a14="http://schemas.microsoft.com/office/drawing/2010/main" xmlns="" w="9525">
                     <a:solidFill>
                       <a:srgbClr val="000000"/>
                     </a:solidFill>
@@ -10626,7 +10627,7 @@
               </a:ln>
               <a:extLst>
                 <a:ext uri="{91240B29-F687-4f45-9708-019B960494DF}">
-                  <a14:hiddenLine xmlns="" xmlns:a14="http://schemas.microsoft.com/office/drawing/2010/main" w="9525">
+                  <a14:hiddenLine xmlns:a14="http://schemas.microsoft.com/office/drawing/2010/main" xmlns="" w="9525">
                     <a:solidFill>
                       <a:srgbClr val="000000"/>
                     </a:solidFill>
@@ -10716,7 +10717,7 @@
               </a:ln>
               <a:extLst>
                 <a:ext uri="{91240B29-F687-4f45-9708-019B960494DF}">
-                  <a14:hiddenLine xmlns="" xmlns:a14="http://schemas.microsoft.com/office/drawing/2010/main" w="9525">
+                  <a14:hiddenLine xmlns:a14="http://schemas.microsoft.com/office/drawing/2010/main" xmlns="" w="9525">
                     <a:solidFill>
                       <a:srgbClr val="000000"/>
                     </a:solidFill>
@@ -10806,7 +10807,7 @@
               </a:ln>
               <a:extLst>
                 <a:ext uri="{91240B29-F687-4f45-9708-019B960494DF}">
-                  <a14:hiddenLine xmlns="" xmlns:a14="http://schemas.microsoft.com/office/drawing/2010/main" w="9525">
+                  <a14:hiddenLine xmlns:a14="http://schemas.microsoft.com/office/drawing/2010/main" xmlns="" w="9525">
                     <a:solidFill>
                       <a:srgbClr val="000000"/>
                     </a:solidFill>
@@ -10871,7 +10872,7 @@
               </a:ln>
               <a:extLst>
                 <a:ext uri="{91240B29-F687-4f45-9708-019B960494DF}">
-                  <a14:hiddenLine xmlns="" xmlns:a14="http://schemas.microsoft.com/office/drawing/2010/main" w="9525">
+                  <a14:hiddenLine xmlns:a14="http://schemas.microsoft.com/office/drawing/2010/main" xmlns="" w="9525">
                     <a:solidFill>
                       <a:srgbClr val="000000"/>
                     </a:solidFill>
@@ -10991,7 +10992,7 @@
               </a:ln>
               <a:extLst>
                 <a:ext uri="{91240B29-F687-4f45-9708-019B960494DF}">
-                  <a14:hiddenLine xmlns="" xmlns:a14="http://schemas.microsoft.com/office/drawing/2010/main" w="9525">
+                  <a14:hiddenLine xmlns:a14="http://schemas.microsoft.com/office/drawing/2010/main" xmlns="" w="9525">
                     <a:solidFill>
                       <a:srgbClr val="000000"/>
                     </a:solidFill>
@@ -11089,7 +11090,7 @@
               </a:ln>
               <a:extLst>
                 <a:ext uri="{91240B29-F687-4f45-9708-019B960494DF}">
-                  <a14:hiddenLine xmlns="" xmlns:a14="http://schemas.microsoft.com/office/drawing/2010/main" w="9525">
+                  <a14:hiddenLine xmlns:a14="http://schemas.microsoft.com/office/drawing/2010/main" xmlns="" w="9525">
                     <a:solidFill>
                       <a:srgbClr val="000000"/>
                     </a:solidFill>
@@ -11204,7 +11205,7 @@
               </a:ln>
               <a:extLst>
                 <a:ext uri="{91240B29-F687-4f45-9708-019B960494DF}">
-                  <a14:hiddenLine xmlns="" xmlns:a14="http://schemas.microsoft.com/office/drawing/2010/main" w="9525">
+                  <a14:hiddenLine xmlns:a14="http://schemas.microsoft.com/office/drawing/2010/main" xmlns="" w="9525">
                     <a:solidFill>
                       <a:srgbClr val="000000"/>
                     </a:solidFill>
@@ -11294,7 +11295,7 @@
               </a:ln>
               <a:extLst>
                 <a:ext uri="{91240B29-F687-4f45-9708-019B960494DF}">
-                  <a14:hiddenLine xmlns="" xmlns:a14="http://schemas.microsoft.com/office/drawing/2010/main" w="9525">
+                  <a14:hiddenLine xmlns:a14="http://schemas.microsoft.com/office/drawing/2010/main" xmlns="" w="9525">
                     <a:solidFill>
                       <a:srgbClr val="000000"/>
                     </a:solidFill>
@@ -11359,7 +11360,7 @@
               </a:ln>
               <a:extLst>
                 <a:ext uri="{91240B29-F687-4f45-9708-019B960494DF}">
-                  <a14:hiddenLine xmlns="" xmlns:a14="http://schemas.microsoft.com/office/drawing/2010/main" w="9525">
+                  <a14:hiddenLine xmlns:a14="http://schemas.microsoft.com/office/drawing/2010/main" xmlns="" w="9525">
                     <a:solidFill>
                       <a:srgbClr val="000000"/>
                     </a:solidFill>
@@ -11449,7 +11450,7 @@
               </a:ln>
               <a:extLst>
                 <a:ext uri="{91240B29-F687-4f45-9708-019B960494DF}">
-                  <a14:hiddenLine xmlns="" xmlns:a14="http://schemas.microsoft.com/office/drawing/2010/main" w="9525">
+                  <a14:hiddenLine xmlns:a14="http://schemas.microsoft.com/office/drawing/2010/main" xmlns="" w="9525">
                     <a:solidFill>
                       <a:srgbClr val="000000"/>
                     </a:solidFill>
@@ -11517,7 +11518,7 @@
               </a:ln>
               <a:extLst>
                 <a:ext uri="{91240B29-F687-4f45-9708-019B960494DF}">
-                  <a14:hiddenLine xmlns="" xmlns:a14="http://schemas.microsoft.com/office/drawing/2010/main" w="9525">
+                  <a14:hiddenLine xmlns:a14="http://schemas.microsoft.com/office/drawing/2010/main" xmlns="" w="9525">
                     <a:solidFill>
                       <a:srgbClr val="000000"/>
                     </a:solidFill>
@@ -11607,7 +11608,7 @@
               </a:ln>
               <a:extLst>
                 <a:ext uri="{91240B29-F687-4f45-9708-019B960494DF}">
-                  <a14:hiddenLine xmlns="" xmlns:a14="http://schemas.microsoft.com/office/drawing/2010/main" w="9525">
+                  <a14:hiddenLine xmlns:a14="http://schemas.microsoft.com/office/drawing/2010/main" xmlns="" w="9525">
                     <a:solidFill>
                       <a:srgbClr val="000000"/>
                     </a:solidFill>
@@ -11675,7 +11676,7 @@
               </a:ln>
               <a:extLst>
                 <a:ext uri="{91240B29-F687-4f45-9708-019B960494DF}">
-                  <a14:hiddenLine xmlns="" xmlns:a14="http://schemas.microsoft.com/office/drawing/2010/main" w="9525">
+                  <a14:hiddenLine xmlns:a14="http://schemas.microsoft.com/office/drawing/2010/main" xmlns="" w="9525">
                     <a:solidFill>
                       <a:srgbClr val="000000"/>
                     </a:solidFill>
@@ -11765,7 +11766,7 @@
               </a:ln>
               <a:extLst>
                 <a:ext uri="{91240B29-F687-4f45-9708-019B960494DF}">
-                  <a14:hiddenLine xmlns="" xmlns:a14="http://schemas.microsoft.com/office/drawing/2010/main" w="9525">
+                  <a14:hiddenLine xmlns:a14="http://schemas.microsoft.com/office/drawing/2010/main" xmlns="" w="9525">
                     <a:solidFill>
                       <a:srgbClr val="000000"/>
                     </a:solidFill>
@@ -11799,7 +11800,7 @@
               </a:ln>
               <a:extLst>
                 <a:ext uri="{91240B29-F687-4f45-9708-019B960494DF}">
-                  <a14:hiddenLine xmlns="" xmlns:a14="http://schemas.microsoft.com/office/drawing/2010/main" w="9525">
+                  <a14:hiddenLine xmlns:a14="http://schemas.microsoft.com/office/drawing/2010/main" xmlns="" w="9525">
                     <a:solidFill>
                       <a:srgbClr val="000000"/>
                     </a:solidFill>
@@ -11940,7 +11941,7 @@
             <a:fld id="{48A87A34-81AB-432B-8DAE-1953F412C126}" type="datetimeFigureOut">
               <a:rPr lang="en-US" dirty="0"/>
               <a:pPr/>
-              <a:t>5/2/2026</a:t>
+              <a:t>5/3/2026</a:t>
             </a:fld>
             <a:endParaRPr lang="en-US" dirty="0"/>
           </a:p>
@@ -12361,7 +12362,7 @@
           <p:cNvPr id="2" name="Заголовок 1">
             <a:extLst>
               <a:ext uri="{FF2B5EF4-FFF2-40B4-BE49-F238E27FC236}">
-                <a16:creationId xmlns:a16="http://schemas.microsoft.com/office/drawing/2014/main" xmlns="" id="{66474CCB-FAC8-2251-7C09-72612271F472}"/>
+                <a16:creationId xmlns="" xmlns:a16="http://schemas.microsoft.com/office/drawing/2014/main" id="{66474CCB-FAC8-2251-7C09-72612271F472}"/>
               </a:ext>
             </a:extLst>
           </p:cNvPr>
@@ -12390,7 +12391,7 @@
           <p:cNvPr id="3" name="Подзаголовок 2">
             <a:extLst>
               <a:ext uri="{FF2B5EF4-FFF2-40B4-BE49-F238E27FC236}">
-                <a16:creationId xmlns:a16="http://schemas.microsoft.com/office/drawing/2014/main" xmlns="" id="{A1A84B73-3502-E438-AC63-F38A4E4DBDF2}"/>
+                <a16:creationId xmlns="" xmlns:a16="http://schemas.microsoft.com/office/drawing/2014/main" id="{A1A84B73-3502-E438-AC63-F38A4E4DBDF2}"/>
               </a:ext>
             </a:extLst>
           </p:cNvPr>
@@ -12417,6 +12418,159 @@
     <p:extLst>
       <p:ext uri="{BB962C8B-B14F-4D97-AF65-F5344CB8AC3E}">
         <p14:creationId xmlns:p14="http://schemas.microsoft.com/office/powerpoint/2010/main" val="511224690"/>
+      </p:ext>
+    </p:extLst>
+  </p:cSld>
+  <p:clrMapOvr>
+    <a:masterClrMapping/>
+  </p:clrMapOvr>
+</p:sld>
+</file>
+
+<file path=ppt/slides/slide10.xml><?xml version="1.0" encoding="utf-8"?>
+<p:sld xmlns:a="http://schemas.openxmlformats.org/drawingml/2006/main" xmlns:r="http://schemas.openxmlformats.org/officeDocument/2006/relationships" xmlns:p="http://schemas.openxmlformats.org/presentationml/2006/main">
+  <p:cSld>
+    <p:spTree>
+      <p:nvGrpSpPr>
+        <p:cNvPr id="1" name="">
+          <a:extLst>
+            <a:ext uri="{FF2B5EF4-FFF2-40B4-BE49-F238E27FC236}">
+              <a16:creationId xmlns="" xmlns:a16="http://schemas.microsoft.com/office/drawing/2014/main" id="{964F5CFC-0098-8213-3E7B-51652F332DDC}"/>
+            </a:ext>
+          </a:extLst>
+        </p:cNvPr>
+        <p:cNvGrpSpPr/>
+        <p:nvPr/>
+      </p:nvGrpSpPr>
+      <p:grpSpPr>
+        <a:xfrm>
+          <a:off x="0" y="0"/>
+          <a:ext cx="0" cy="0"/>
+          <a:chOff x="0" y="0"/>
+          <a:chExt cx="0" cy="0"/>
+        </a:xfrm>
+      </p:grpSpPr>
+      <p:sp>
+        <p:nvSpPr>
+          <p:cNvPr id="3" name="Объект 2">
+            <a:extLst>
+              <a:ext uri="{FF2B5EF4-FFF2-40B4-BE49-F238E27FC236}">
+                <a16:creationId xmlns="" xmlns:a16="http://schemas.microsoft.com/office/drawing/2014/main" id="{ADB88EFC-99D8-B64F-AA43-B327D6F0C91C}"/>
+              </a:ext>
+            </a:extLst>
+          </p:cNvPr>
+          <p:cNvSpPr>
+            <a:spLocks noGrp="1"/>
+          </p:cNvSpPr>
+          <p:nvPr>
+            <p:ph idx="1"/>
+          </p:nvPr>
+        </p:nvSpPr>
+        <p:spPr>
+          <a:xfrm>
+            <a:off x="1143000" y="649287"/>
+            <a:ext cx="9905999" cy="2779713"/>
+          </a:xfrm>
+        </p:spPr>
+        <p:txBody>
+          <a:bodyPr>
+            <a:normAutofit lnSpcReduction="10000"/>
+          </a:bodyPr>
+          <a:lstStyle/>
+          <a:p>
+            <a:pPr marL="0" lvl="0" indent="0" algn="just">
+              <a:buNone/>
+            </a:pPr>
+            <a:r>
+              <a:rPr lang="ru-RU" dirty="0"/>
+              <a:t>Акция-подарок-замена товара (в выгрузке из </a:t>
+            </a:r>
+            <a:r>
+              <a:rPr lang="en-US" dirty="0"/>
+              <a:t>API</a:t>
+            </a:r>
+            <a:r>
+              <a:rPr lang="ru-RU" dirty="0"/>
+              <a:t> имеются данные, содержащие количество товара и нулевую стоимость заказа, </a:t>
+            </a:r>
+            <a:r>
+              <a:rPr lang="ru-RU" dirty="0" smtClean="0"/>
+              <a:t>подразумевается, </a:t>
+            </a:r>
+            <a:r>
+              <a:rPr lang="ru-RU" dirty="0"/>
+              <a:t>что это товар, попавший под акцию, подарок, замену): количество таких товаров </a:t>
+            </a:r>
+            <a:r>
+              <a:rPr lang="ru-RU" dirty="0" smtClean="0"/>
+              <a:t>8142, </a:t>
+            </a:r>
+            <a:r>
+              <a:rPr lang="ru-RU" dirty="0"/>
+              <a:t>общая упущенная выручка </a:t>
+            </a:r>
+            <a:r>
+              <a:rPr lang="ru-RU" dirty="0" smtClean="0"/>
+              <a:t>68,2 </a:t>
+            </a:r>
+            <a:r>
+              <a:rPr lang="ru-RU" dirty="0"/>
+              <a:t>млн. руб., средняя упущенная выручка на 1 товар </a:t>
+            </a:r>
+            <a:r>
+              <a:rPr lang="ru-RU" dirty="0" smtClean="0"/>
+              <a:t>8380 </a:t>
+            </a:r>
+            <a:r>
+              <a:rPr lang="ru-RU" dirty="0"/>
+              <a:t>руб. </a:t>
+            </a:r>
+          </a:p>
+          <a:p>
+            <a:pPr marL="0" indent="0" algn="just">
+              <a:buNone/>
+            </a:pPr>
+            <a:r>
+              <a:rPr lang="ru-RU" dirty="0"/>
+              <a:t>Рекомендации: ввести ограничения по стоимости товара по акции.</a:t>
+            </a:r>
+          </a:p>
+        </p:txBody>
+      </p:sp>
+      <p:pic>
+        <p:nvPicPr>
+          <p:cNvPr id="4" name="Рисунок 3">
+            <a:extLst>
+              <a:ext uri="{FF2B5EF4-FFF2-40B4-BE49-F238E27FC236}">
+                <a16:creationId xmlns="" xmlns:a16="http://schemas.microsoft.com/office/drawing/2014/main" id="{E7E45C83-92B1-7D5A-032A-737CAF571B88}"/>
+              </a:ext>
+            </a:extLst>
+          </p:cNvPr>
+          <p:cNvPicPr>
+            <a:picLocks noChangeAspect="1"/>
+          </p:cNvPicPr>
+          <p:nvPr/>
+        </p:nvPicPr>
+        <p:blipFill>
+          <a:blip r:embed="rId2"/>
+          <a:stretch>
+            <a:fillRect/>
+          </a:stretch>
+        </p:blipFill>
+        <p:spPr>
+          <a:xfrm>
+            <a:off x="1171574" y="3594100"/>
+            <a:ext cx="9877425" cy="2895600"/>
+          </a:xfrm>
+          <a:prstGeom prst="rect">
+            <a:avLst/>
+          </a:prstGeom>
+        </p:spPr>
+      </p:pic>
+    </p:spTree>
+    <p:extLst>
+      <p:ext uri="{BB962C8B-B14F-4D97-AF65-F5344CB8AC3E}">
+        <p14:creationId xmlns:p14="http://schemas.microsoft.com/office/powerpoint/2010/main" val="931170159"/>
       </p:ext>
     </p:extLst>
   </p:cSld>
@@ -12448,7 +12602,7 @@
           <p:cNvPr id="2" name="Заголовок 1">
             <a:extLst>
               <a:ext uri="{FF2B5EF4-FFF2-40B4-BE49-F238E27FC236}">
-                <a16:creationId xmlns:a16="http://schemas.microsoft.com/office/drawing/2014/main" xmlns="" id="{3C792A5A-C2DD-FA6E-B94A-61FEBB0A38B7}"/>
+                <a16:creationId xmlns="" xmlns:a16="http://schemas.microsoft.com/office/drawing/2014/main" id="{3C792A5A-C2DD-FA6E-B94A-61FEBB0A38B7}"/>
               </a:ext>
             </a:extLst>
           </p:cNvPr>
@@ -12471,13 +12625,10 @@
           <a:p>
             <a:pPr algn="ctr"/>
             <a:r>
-              <a:rPr lang="en-US" dirty="0"/>
-              <a:t>ABC-XYZ</a:t>
-            </a:r>
-            <a:r>
-              <a:rPr lang="ru-RU" dirty="0"/>
-              <a:t> анализ товаров</a:t>
-            </a:r>
+              <a:rPr lang="ru-RU" dirty="0" smtClean="0"/>
+              <a:t>АССОРТИМЕНТНЫЙ АНАЛИЗ</a:t>
+            </a:r>
+            <a:endParaRPr lang="ru-RU" dirty="0"/>
           </a:p>
         </p:txBody>
       </p:sp>
@@ -12486,7 +12637,160 @@
           <p:cNvPr id="3" name="Объект 2">
             <a:extLst>
               <a:ext uri="{FF2B5EF4-FFF2-40B4-BE49-F238E27FC236}">
-                <a16:creationId xmlns:a16="http://schemas.microsoft.com/office/drawing/2014/main" xmlns="" id="{5DCFA8C6-8059-6DDE-BBE7-BD9C72B627A9}"/>
+                <a16:creationId xmlns="" xmlns:a16="http://schemas.microsoft.com/office/drawing/2014/main" id="{5DCFA8C6-8059-6DDE-BBE7-BD9C72B627A9}"/>
+              </a:ext>
+            </a:extLst>
+          </p:cNvPr>
+          <p:cNvSpPr>
+            <a:spLocks noGrp="1"/>
+          </p:cNvSpPr>
+          <p:nvPr>
+            <p:ph idx="1"/>
+          </p:nvPr>
+        </p:nvSpPr>
+        <p:spPr>
+          <a:xfrm>
+            <a:off x="1141412" y="1549399"/>
+            <a:ext cx="9905999" cy="3541714"/>
+          </a:xfrm>
+        </p:spPr>
+        <p:txBody>
+          <a:bodyPr/>
+          <a:lstStyle/>
+          <a:p>
+            <a:pPr marL="0" indent="0" algn="just">
+              <a:buNone/>
+            </a:pPr>
+            <a:r>
+              <a:rPr lang="ru-RU" dirty="0"/>
+              <a:t>это </a:t>
+            </a:r>
+            <a:r>
+              <a:rPr lang="ru-RU" dirty="0" smtClean="0"/>
+              <a:t>изучение</a:t>
+            </a:r>
+            <a:r>
+              <a:rPr lang="ru-RU" dirty="0"/>
+              <a:t> </a:t>
+            </a:r>
+            <a:r>
+              <a:rPr lang="ru-RU" dirty="0" smtClean="0"/>
+              <a:t>того, </a:t>
+            </a:r>
+            <a:r>
+              <a:rPr lang="ru-RU" b="1" dirty="0" smtClean="0"/>
+              <a:t>какие </a:t>
+            </a:r>
+            <a:r>
+              <a:rPr lang="ru-RU" b="1" dirty="0"/>
+              <a:t>товары вы продаёте</a:t>
+            </a:r>
+            <a:r>
+              <a:rPr lang="ru-RU" dirty="0"/>
+              <a:t> и как они влияют на выручку, прибыль и лояльность клиентов.</a:t>
+            </a:r>
+          </a:p>
+          <a:p>
+            <a:pPr marL="0" indent="0" algn="just">
+              <a:buNone/>
+            </a:pPr>
+            <a:r>
+              <a:rPr lang="ru-RU" dirty="0"/>
+              <a:t>Если анализ клиентской базы отвечает на вопрос </a:t>
+            </a:r>
+            <a:r>
+              <a:rPr lang="ru-RU" b="1" dirty="0"/>
+              <a:t>«кто наши лучшие клиенты»</a:t>
+            </a:r>
+            <a:r>
+              <a:rPr lang="ru-RU" dirty="0"/>
+              <a:t>, то ассортиментный анализ отвечает на вопрос </a:t>
+            </a:r>
+            <a:r>
+              <a:rPr lang="ru-RU" b="1" dirty="0"/>
+              <a:t>«какие товары приносят деньги, а какие — убытки и зачем они вообще нужны»</a:t>
+            </a:r>
+            <a:r>
+              <a:rPr lang="ru-RU" dirty="0"/>
+              <a:t>.</a:t>
+            </a:r>
+          </a:p>
+        </p:txBody>
+      </p:sp>
+    </p:spTree>
+    <p:extLst>
+      <p:ext uri="{BB962C8B-B14F-4D97-AF65-F5344CB8AC3E}">
+        <p14:creationId xmlns:p14="http://schemas.microsoft.com/office/powerpoint/2010/main" val="3816954290"/>
+      </p:ext>
+    </p:extLst>
+  </p:cSld>
+  <p:clrMapOvr>
+    <a:masterClrMapping/>
+  </p:clrMapOvr>
+</p:sld>
+</file>
+
+<file path=ppt/slides/slide3.xml><?xml version="1.0" encoding="utf-8"?>
+<p:sld xmlns:a="http://schemas.openxmlformats.org/drawingml/2006/main" xmlns:r="http://schemas.openxmlformats.org/officeDocument/2006/relationships" xmlns:p="http://schemas.openxmlformats.org/presentationml/2006/main">
+  <p:cSld>
+    <p:spTree>
+      <p:nvGrpSpPr>
+        <p:cNvPr id="1" name=""/>
+        <p:cNvGrpSpPr/>
+        <p:nvPr/>
+      </p:nvGrpSpPr>
+      <p:grpSpPr>
+        <a:xfrm>
+          <a:off x="0" y="0"/>
+          <a:ext cx="0" cy="0"/>
+          <a:chOff x="0" y="0"/>
+          <a:chExt cx="0" cy="0"/>
+        </a:xfrm>
+      </p:grpSpPr>
+      <p:sp>
+        <p:nvSpPr>
+          <p:cNvPr id="2" name="Заголовок 1">
+            <a:extLst>
+              <a:ext uri="{FF2B5EF4-FFF2-40B4-BE49-F238E27FC236}">
+                <a16:creationId xmlns="" xmlns:a16="http://schemas.microsoft.com/office/drawing/2014/main" id="{3C792A5A-C2DD-FA6E-B94A-61FEBB0A38B7}"/>
+              </a:ext>
+            </a:extLst>
+          </p:cNvPr>
+          <p:cNvSpPr>
+            <a:spLocks noGrp="1"/>
+          </p:cNvSpPr>
+          <p:nvPr>
+            <p:ph type="title"/>
+          </p:nvPr>
+        </p:nvSpPr>
+        <p:spPr>
+          <a:xfrm>
+            <a:off x="1141413" y="70829"/>
+            <a:ext cx="9905998" cy="1478570"/>
+          </a:xfrm>
+        </p:spPr>
+        <p:txBody>
+          <a:bodyPr/>
+          <a:lstStyle/>
+          <a:p>
+            <a:pPr algn="ctr"/>
+            <a:r>
+              <a:rPr lang="en-US" dirty="0"/>
+              <a:t>ABC-XYZ</a:t>
+            </a:r>
+            <a:r>
+              <a:rPr lang="ru-RU" dirty="0"/>
+              <a:t> анализ товаров</a:t>
+            </a:r>
+          </a:p>
+        </p:txBody>
+      </p:sp>
+      <p:sp>
+        <p:nvSpPr>
+          <p:cNvPr id="3" name="Объект 2">
+            <a:extLst>
+              <a:ext uri="{FF2B5EF4-FFF2-40B4-BE49-F238E27FC236}">
+                <a16:creationId xmlns="" xmlns:a16="http://schemas.microsoft.com/office/drawing/2014/main" id="{5DCFA8C6-8059-6DDE-BBE7-BD9C72B627A9}"/>
               </a:ext>
             </a:extLst>
           </p:cNvPr>
@@ -12554,7 +12858,7 @@
           <p:cNvPr id="7" name="Рисунок 6">
             <a:extLst>
               <a:ext uri="{FF2B5EF4-FFF2-40B4-BE49-F238E27FC236}">
-                <a16:creationId xmlns:a16="http://schemas.microsoft.com/office/drawing/2014/main" xmlns="" id="{703A771C-9524-697C-6251-B162574C4CAB}"/>
+                <a16:creationId xmlns="" xmlns:a16="http://schemas.microsoft.com/office/drawing/2014/main" id="{703A771C-9524-697C-6251-B162574C4CAB}"/>
               </a:ext>
             </a:extLst>
           </p:cNvPr>
@@ -12582,7 +12886,7 @@
     </p:spTree>
     <p:extLst>
       <p:ext uri="{BB962C8B-B14F-4D97-AF65-F5344CB8AC3E}">
-        <p14:creationId xmlns:p14="http://schemas.microsoft.com/office/powerpoint/2010/main" val="3816954290"/>
+        <p14:creationId xmlns:p14="http://schemas.microsoft.com/office/powerpoint/2010/main" val="1629722053"/>
       </p:ext>
     </p:extLst>
   </p:cSld>
@@ -12592,7 +12896,7 @@
 </p:sld>
 </file>
 
-<file path=ppt/slides/slide3.xml><?xml version="1.0" encoding="utf-8"?>
+<file path=ppt/slides/slide4.xml><?xml version="1.0" encoding="utf-8"?>
 <p:sld xmlns:a="http://schemas.openxmlformats.org/drawingml/2006/main" xmlns:r="http://schemas.openxmlformats.org/officeDocument/2006/relationships" xmlns:p="http://schemas.openxmlformats.org/presentationml/2006/main">
   <p:cSld>
     <p:spTree>
@@ -12600,7 +12904,7 @@
         <p:cNvPr id="1" name="">
           <a:extLst>
             <a:ext uri="{FF2B5EF4-FFF2-40B4-BE49-F238E27FC236}">
-              <a16:creationId xmlns:a16="http://schemas.microsoft.com/office/drawing/2014/main" xmlns="" id="{276C961E-28BB-BE52-409B-6DA3AF951108}"/>
+              <a16:creationId xmlns="" xmlns:a16="http://schemas.microsoft.com/office/drawing/2014/main" id="{276C961E-28BB-BE52-409B-6DA3AF951108}"/>
             </a:ext>
           </a:extLst>
         </p:cNvPr>
@@ -12620,7 +12924,7 @@
           <p:cNvPr id="3" name="Объект 2">
             <a:extLst>
               <a:ext uri="{FF2B5EF4-FFF2-40B4-BE49-F238E27FC236}">
-                <a16:creationId xmlns:a16="http://schemas.microsoft.com/office/drawing/2014/main" xmlns="" id="{060EA57B-19C5-1FE2-F90F-2974D986C64B}"/>
+                <a16:creationId xmlns="" xmlns:a16="http://schemas.microsoft.com/office/drawing/2014/main" id="{060EA57B-19C5-1FE2-F90F-2974D986C64B}"/>
               </a:ext>
             </a:extLst>
           </p:cNvPr>
@@ -12758,7 +13062,7 @@
 </p:sld>
 </file>
 
-<file path=ppt/slides/slide4.xml><?xml version="1.0" encoding="utf-8"?>
+<file path=ppt/slides/slide5.xml><?xml version="1.0" encoding="utf-8"?>
 <p:sld xmlns:a="http://schemas.openxmlformats.org/drawingml/2006/main" xmlns:r="http://schemas.openxmlformats.org/officeDocument/2006/relationships" xmlns:p="http://schemas.openxmlformats.org/presentationml/2006/main">
   <p:cSld>
     <p:spTree>
@@ -12780,7 +13084,7 @@
           <p:cNvPr id="3" name="Объект 2">
             <a:extLst>
               <a:ext uri="{FF2B5EF4-FFF2-40B4-BE49-F238E27FC236}">
-                <a16:creationId xmlns:a16="http://schemas.microsoft.com/office/drawing/2014/main" xmlns="" id="{B5211767-7C5F-5788-6E08-553536117460}"/>
+                <a16:creationId xmlns="" xmlns:a16="http://schemas.microsoft.com/office/drawing/2014/main" id="{B5211767-7C5F-5788-6E08-553536117460}"/>
               </a:ext>
             </a:extLst>
           </p:cNvPr>
@@ -12830,7 +13134,7 @@
           <p:cNvPr id="6" name="Рисунок 5">
             <a:extLst>
               <a:ext uri="{FF2B5EF4-FFF2-40B4-BE49-F238E27FC236}">
-                <a16:creationId xmlns:a16="http://schemas.microsoft.com/office/drawing/2014/main" xmlns="" id="{37F1211B-1F27-932E-72EA-F27BCE5C2265}"/>
+                <a16:creationId xmlns="" xmlns:a16="http://schemas.microsoft.com/office/drawing/2014/main" id="{37F1211B-1F27-932E-72EA-F27BCE5C2265}"/>
               </a:ext>
             </a:extLst>
           </p:cNvPr>
@@ -12860,7 +13164,7 @@
           <p:cNvPr id="8" name="Рисунок 7">
             <a:extLst>
               <a:ext uri="{FF2B5EF4-FFF2-40B4-BE49-F238E27FC236}">
-                <a16:creationId xmlns:a16="http://schemas.microsoft.com/office/drawing/2014/main" xmlns="" id="{2BE4DFF2-8EE2-EA13-1E5D-54CAC77F7211}"/>
+                <a16:creationId xmlns="" xmlns:a16="http://schemas.microsoft.com/office/drawing/2014/main" id="{2BE4DFF2-8EE2-EA13-1E5D-54CAC77F7211}"/>
               </a:ext>
             </a:extLst>
           </p:cNvPr>
@@ -12898,7 +13202,7 @@
 </p:sld>
 </file>
 
-<file path=ppt/slides/slide5.xml><?xml version="1.0" encoding="utf-8"?>
+<file path=ppt/slides/slide6.xml><?xml version="1.0" encoding="utf-8"?>
 <p:sld xmlns:a="http://schemas.openxmlformats.org/drawingml/2006/main" xmlns:r="http://schemas.openxmlformats.org/officeDocument/2006/relationships" xmlns:p="http://schemas.openxmlformats.org/presentationml/2006/main">
   <p:cSld>
     <p:spTree>
@@ -12906,7 +13210,7 @@
         <p:cNvPr id="1" name="">
           <a:extLst>
             <a:ext uri="{FF2B5EF4-FFF2-40B4-BE49-F238E27FC236}">
-              <a16:creationId xmlns:a16="http://schemas.microsoft.com/office/drawing/2014/main" xmlns="" id="{968327AD-398E-C717-F7DD-2DEF4DC7296F}"/>
+              <a16:creationId xmlns="" xmlns:a16="http://schemas.microsoft.com/office/drawing/2014/main" id="{968327AD-398E-C717-F7DD-2DEF4DC7296F}"/>
             </a:ext>
           </a:extLst>
         </p:cNvPr>
@@ -12926,7 +13230,7 @@
           <p:cNvPr id="3" name="Объект 2">
             <a:extLst>
               <a:ext uri="{FF2B5EF4-FFF2-40B4-BE49-F238E27FC236}">
-                <a16:creationId xmlns:a16="http://schemas.microsoft.com/office/drawing/2014/main" xmlns="" id="{0A7A6DBD-A582-0193-3170-114B0686595B}"/>
+                <a16:creationId xmlns="" xmlns:a16="http://schemas.microsoft.com/office/drawing/2014/main" id="{0A7A6DBD-A582-0193-3170-114B0686595B}"/>
               </a:ext>
             </a:extLst>
           </p:cNvPr>
@@ -13032,7 +13336,7 @@
           <p:cNvPr id="5" name="Рисунок 4">
             <a:extLst>
               <a:ext uri="{FF2B5EF4-FFF2-40B4-BE49-F238E27FC236}">
-                <a16:creationId xmlns:a16="http://schemas.microsoft.com/office/drawing/2014/main" xmlns="" id="{422DA451-800A-2C04-45EC-AB5FC0253285}"/>
+                <a16:creationId xmlns="" xmlns:a16="http://schemas.microsoft.com/office/drawing/2014/main" id="{422DA451-800A-2C04-45EC-AB5FC0253285}"/>
               </a:ext>
             </a:extLst>
           </p:cNvPr>
@@ -13070,7 +13374,7 @@
 </p:sld>
 </file>
 
-<file path=ppt/slides/slide6.xml><?xml version="1.0" encoding="utf-8"?>
+<file path=ppt/slides/slide7.xml><?xml version="1.0" encoding="utf-8"?>
 <p:sld xmlns:a="http://schemas.openxmlformats.org/drawingml/2006/main" xmlns:r="http://schemas.openxmlformats.org/officeDocument/2006/relationships" xmlns:p="http://schemas.openxmlformats.org/presentationml/2006/main">
   <p:cSld>
     <p:spTree>
@@ -13078,7 +13382,7 @@
         <p:cNvPr id="1" name="">
           <a:extLst>
             <a:ext uri="{FF2B5EF4-FFF2-40B4-BE49-F238E27FC236}">
-              <a16:creationId xmlns:a16="http://schemas.microsoft.com/office/drawing/2014/main" xmlns="" id="{3F7DD344-D933-A9CE-4045-8F6982671B0E}"/>
+              <a16:creationId xmlns="" xmlns:a16="http://schemas.microsoft.com/office/drawing/2014/main" id="{3F7DD344-D933-A9CE-4045-8F6982671B0E}"/>
             </a:ext>
           </a:extLst>
         </p:cNvPr>
@@ -13098,7 +13402,7 @@
           <p:cNvPr id="3" name="Объект 2">
             <a:extLst>
               <a:ext uri="{FF2B5EF4-FFF2-40B4-BE49-F238E27FC236}">
-                <a16:creationId xmlns:a16="http://schemas.microsoft.com/office/drawing/2014/main" xmlns="" id="{AC50183A-1E33-39CB-60E5-88DDC52E5FE5}"/>
+                <a16:creationId xmlns="" xmlns:a16="http://schemas.microsoft.com/office/drawing/2014/main" id="{AC50183A-1E33-39CB-60E5-88DDC52E5FE5}"/>
               </a:ext>
             </a:extLst>
           </p:cNvPr>
@@ -13142,7 +13446,7 @@
           <p:cNvPr id="4" name="Рисунок 3">
             <a:extLst>
               <a:ext uri="{FF2B5EF4-FFF2-40B4-BE49-F238E27FC236}">
-                <a16:creationId xmlns:a16="http://schemas.microsoft.com/office/drawing/2014/main" xmlns="" id="{D95AE1FB-165D-4953-56F0-A680E0B0602A}"/>
+                <a16:creationId xmlns="" xmlns:a16="http://schemas.microsoft.com/office/drawing/2014/main" id="{D95AE1FB-165D-4953-56F0-A680E0B0602A}"/>
               </a:ext>
             </a:extLst>
           </p:cNvPr>
@@ -13180,7 +13484,7 @@
 </p:sld>
 </file>
 
-<file path=ppt/slides/slide7.xml><?xml version="1.0" encoding="utf-8"?>
+<file path=ppt/slides/slide8.xml><?xml version="1.0" encoding="utf-8"?>
 <p:sld xmlns:a="http://schemas.openxmlformats.org/drawingml/2006/main" xmlns:r="http://schemas.openxmlformats.org/officeDocument/2006/relationships" xmlns:p="http://schemas.openxmlformats.org/presentationml/2006/main">
   <p:cSld>
     <p:spTree>
@@ -13188,7 +13492,7 @@
         <p:cNvPr id="1" name="">
           <a:extLst>
             <a:ext uri="{FF2B5EF4-FFF2-40B4-BE49-F238E27FC236}">
-              <a16:creationId xmlns:a16="http://schemas.microsoft.com/office/drawing/2014/main" xmlns="" id="{9D98594E-11EE-AEC4-5601-28A12DEC0F7B}"/>
+              <a16:creationId xmlns="" xmlns:a16="http://schemas.microsoft.com/office/drawing/2014/main" id="{9D98594E-11EE-AEC4-5601-28A12DEC0F7B}"/>
             </a:ext>
           </a:extLst>
         </p:cNvPr>
@@ -13208,7 +13512,7 @@
           <p:cNvPr id="3" name="Объект 2">
             <a:extLst>
               <a:ext uri="{FF2B5EF4-FFF2-40B4-BE49-F238E27FC236}">
-                <a16:creationId xmlns:a16="http://schemas.microsoft.com/office/drawing/2014/main" xmlns="" id="{745B27DD-4D75-CAAA-240C-5E0239ED7158}"/>
+                <a16:creationId xmlns="" xmlns:a16="http://schemas.microsoft.com/office/drawing/2014/main" id="{745B27DD-4D75-CAAA-240C-5E0239ED7158}"/>
               </a:ext>
             </a:extLst>
           </p:cNvPr>
@@ -13300,7 +13604,6 @@
               <a:rPr lang="ru-RU" dirty="0" smtClean="0"/>
               <a:t>.</a:t>
             </a:r>
-            <a:endParaRPr lang="ru-RU" dirty="0" smtClean="0"/>
           </a:p>
           <a:p>
             <a:pPr marL="0" indent="0" algn="just">
@@ -13337,7 +13640,7 @@
           <p:cNvPr id="5" name="Рисунок 4">
             <a:extLst>
               <a:ext uri="{FF2B5EF4-FFF2-40B4-BE49-F238E27FC236}">
-                <a16:creationId xmlns:a16="http://schemas.microsoft.com/office/drawing/2014/main" xmlns="" id="{9FD47A18-9F93-A759-9896-4A506140FC11}"/>
+                <a16:creationId xmlns="" xmlns:a16="http://schemas.microsoft.com/office/drawing/2014/main" id="{9FD47A18-9F93-A759-9896-4A506140FC11}"/>
               </a:ext>
             </a:extLst>
           </p:cNvPr>
@@ -13399,7 +13702,7 @@
 </p:sld>
 </file>
 
-<file path=ppt/slides/slide8.xml><?xml version="1.0" encoding="utf-8"?>
+<file path=ppt/slides/slide9.xml><?xml version="1.0" encoding="utf-8"?>
 <p:sld xmlns:a="http://schemas.openxmlformats.org/drawingml/2006/main" xmlns:r="http://schemas.openxmlformats.org/officeDocument/2006/relationships" xmlns:p="http://schemas.openxmlformats.org/presentationml/2006/main">
   <p:cSld>
     <p:spTree>
@@ -13407,7 +13710,7 @@
         <p:cNvPr id="1" name="">
           <a:extLst>
             <a:ext uri="{FF2B5EF4-FFF2-40B4-BE49-F238E27FC236}">
-              <a16:creationId xmlns:a16="http://schemas.microsoft.com/office/drawing/2014/main" xmlns="" id="{B2F6AC63-15E4-4D44-904F-EA132D456B7C}"/>
+              <a16:creationId xmlns="" xmlns:a16="http://schemas.microsoft.com/office/drawing/2014/main" id="{B2F6AC63-15E4-4D44-904F-EA132D456B7C}"/>
             </a:ext>
           </a:extLst>
         </p:cNvPr>
@@ -13427,7 +13730,7 @@
           <p:cNvPr id="3" name="Объект 2">
             <a:extLst>
               <a:ext uri="{FF2B5EF4-FFF2-40B4-BE49-F238E27FC236}">
-                <a16:creationId xmlns:a16="http://schemas.microsoft.com/office/drawing/2014/main" xmlns="" id="{E9DAF347-918B-2FC2-8B9F-75200721C6E8}"/>
+                <a16:creationId xmlns="" xmlns:a16="http://schemas.microsoft.com/office/drawing/2014/main" id="{E9DAF347-918B-2FC2-8B9F-75200721C6E8}"/>
               </a:ext>
             </a:extLst>
           </p:cNvPr>
@@ -13494,7 +13797,7 @@
           <p:cNvPr id="7" name="Рисунок 6">
             <a:extLst>
               <a:ext uri="{FF2B5EF4-FFF2-40B4-BE49-F238E27FC236}">
-                <a16:creationId xmlns:a16="http://schemas.microsoft.com/office/drawing/2014/main" xmlns="" id="{6E71F542-8B22-C47A-A96C-1287A4550239}"/>
+                <a16:creationId xmlns="" xmlns:a16="http://schemas.microsoft.com/office/drawing/2014/main" id="{6E71F542-8B22-C47A-A96C-1287A4550239}"/>
               </a:ext>
             </a:extLst>
           </p:cNvPr>
@@ -13523,159 +13826,6 @@
     <p:extLst>
       <p:ext uri="{BB962C8B-B14F-4D97-AF65-F5344CB8AC3E}">
         <p14:creationId xmlns:p14="http://schemas.microsoft.com/office/powerpoint/2010/main" val="4113939109"/>
-      </p:ext>
-    </p:extLst>
-  </p:cSld>
-  <p:clrMapOvr>
-    <a:masterClrMapping/>
-  </p:clrMapOvr>
-</p:sld>
-</file>
-
-<file path=ppt/slides/slide9.xml><?xml version="1.0" encoding="utf-8"?>
-<p:sld xmlns:a="http://schemas.openxmlformats.org/drawingml/2006/main" xmlns:r="http://schemas.openxmlformats.org/officeDocument/2006/relationships" xmlns:p="http://schemas.openxmlformats.org/presentationml/2006/main">
-  <p:cSld>
-    <p:spTree>
-      <p:nvGrpSpPr>
-        <p:cNvPr id="1" name="">
-          <a:extLst>
-            <a:ext uri="{FF2B5EF4-FFF2-40B4-BE49-F238E27FC236}">
-              <a16:creationId xmlns:a16="http://schemas.microsoft.com/office/drawing/2014/main" xmlns="" id="{964F5CFC-0098-8213-3E7B-51652F332DDC}"/>
-            </a:ext>
-          </a:extLst>
-        </p:cNvPr>
-        <p:cNvGrpSpPr/>
-        <p:nvPr/>
-      </p:nvGrpSpPr>
-      <p:grpSpPr>
-        <a:xfrm>
-          <a:off x="0" y="0"/>
-          <a:ext cx="0" cy="0"/>
-          <a:chOff x="0" y="0"/>
-          <a:chExt cx="0" cy="0"/>
-        </a:xfrm>
-      </p:grpSpPr>
-      <p:sp>
-        <p:nvSpPr>
-          <p:cNvPr id="3" name="Объект 2">
-            <a:extLst>
-              <a:ext uri="{FF2B5EF4-FFF2-40B4-BE49-F238E27FC236}">
-                <a16:creationId xmlns:a16="http://schemas.microsoft.com/office/drawing/2014/main" xmlns="" id="{ADB88EFC-99D8-B64F-AA43-B327D6F0C91C}"/>
-              </a:ext>
-            </a:extLst>
-          </p:cNvPr>
-          <p:cNvSpPr>
-            <a:spLocks noGrp="1"/>
-          </p:cNvSpPr>
-          <p:nvPr>
-            <p:ph idx="1"/>
-          </p:nvPr>
-        </p:nvSpPr>
-        <p:spPr>
-          <a:xfrm>
-            <a:off x="1143000" y="649287"/>
-            <a:ext cx="9905999" cy="2779713"/>
-          </a:xfrm>
-        </p:spPr>
-        <p:txBody>
-          <a:bodyPr>
-            <a:normAutofit lnSpcReduction="10000"/>
-          </a:bodyPr>
-          <a:lstStyle/>
-          <a:p>
-            <a:pPr marL="0" lvl="0" indent="0" algn="just">
-              <a:buNone/>
-            </a:pPr>
-            <a:r>
-              <a:rPr lang="ru-RU" dirty="0"/>
-              <a:t>Акция-подарок-замена товара (в выгрузке из </a:t>
-            </a:r>
-            <a:r>
-              <a:rPr lang="en-US" dirty="0"/>
-              <a:t>API</a:t>
-            </a:r>
-            <a:r>
-              <a:rPr lang="ru-RU" dirty="0"/>
-              <a:t> имеются данные, содержащие количество товара и нулевую стоимость заказа, </a:t>
-            </a:r>
-            <a:r>
-              <a:rPr lang="ru-RU" dirty="0" smtClean="0"/>
-              <a:t>подразумевается, </a:t>
-            </a:r>
-            <a:r>
-              <a:rPr lang="ru-RU" dirty="0"/>
-              <a:t>что это товар, попавший под акцию, подарок, замену): количество таких товаров </a:t>
-            </a:r>
-            <a:r>
-              <a:rPr lang="ru-RU" dirty="0" smtClean="0"/>
-              <a:t>8142, </a:t>
-            </a:r>
-            <a:r>
-              <a:rPr lang="ru-RU" dirty="0"/>
-              <a:t>общая упущенная выручка </a:t>
-            </a:r>
-            <a:r>
-              <a:rPr lang="ru-RU" dirty="0" smtClean="0"/>
-              <a:t>68,2 </a:t>
-            </a:r>
-            <a:r>
-              <a:rPr lang="ru-RU" dirty="0"/>
-              <a:t>млн. руб., средняя упущенная выручка на 1 товар </a:t>
-            </a:r>
-            <a:r>
-              <a:rPr lang="ru-RU" dirty="0" smtClean="0"/>
-              <a:t>8380 </a:t>
-            </a:r>
-            <a:r>
-              <a:rPr lang="ru-RU" dirty="0"/>
-              <a:t>руб. </a:t>
-            </a:r>
-          </a:p>
-          <a:p>
-            <a:pPr marL="0" indent="0" algn="just">
-              <a:buNone/>
-            </a:pPr>
-            <a:r>
-              <a:rPr lang="ru-RU" dirty="0"/>
-              <a:t>Рекомендации: ввести ограничения по стоимости товара по акции.</a:t>
-            </a:r>
-          </a:p>
-        </p:txBody>
-      </p:sp>
-      <p:pic>
-        <p:nvPicPr>
-          <p:cNvPr id="4" name="Рисунок 3">
-            <a:extLst>
-              <a:ext uri="{FF2B5EF4-FFF2-40B4-BE49-F238E27FC236}">
-                <a16:creationId xmlns:a16="http://schemas.microsoft.com/office/drawing/2014/main" xmlns="" id="{E7E45C83-92B1-7D5A-032A-737CAF571B88}"/>
-              </a:ext>
-            </a:extLst>
-          </p:cNvPr>
-          <p:cNvPicPr>
-            <a:picLocks noChangeAspect="1"/>
-          </p:cNvPicPr>
-          <p:nvPr/>
-        </p:nvPicPr>
-        <p:blipFill>
-          <a:blip r:embed="rId2"/>
-          <a:stretch>
-            <a:fillRect/>
-          </a:stretch>
-        </p:blipFill>
-        <p:spPr>
-          <a:xfrm>
-            <a:off x="1171574" y="3594100"/>
-            <a:ext cx="9877425" cy="2895600"/>
-          </a:xfrm>
-          <a:prstGeom prst="rect">
-            <a:avLst/>
-          </a:prstGeom>
-        </p:spPr>
-      </p:pic>
-    </p:spTree>
-    <p:extLst>
-      <p:ext uri="{BB962C8B-B14F-4D97-AF65-F5344CB8AC3E}">
-        <p14:creationId xmlns:p14="http://schemas.microsoft.com/office/powerpoint/2010/main" val="931170159"/>
       </p:ext>
     </p:extLst>
   </p:cSld>

--- a/Презентации/Ассортиментный анализ.pptx
+++ b/Презентации/Ассортиментный анализ.pptx
@@ -11,10 +11,12 @@
     <p:sldId id="258" r:id="rId5"/>
     <p:sldId id="259" r:id="rId6"/>
     <p:sldId id="261" r:id="rId7"/>
-    <p:sldId id="260" r:id="rId8"/>
-    <p:sldId id="262" r:id="rId9"/>
-    <p:sldId id="263" r:id="rId10"/>
-    <p:sldId id="264" r:id="rId11"/>
+    <p:sldId id="266" r:id="rId8"/>
+    <p:sldId id="260" r:id="rId9"/>
+    <p:sldId id="267" r:id="rId10"/>
+    <p:sldId id="262" r:id="rId11"/>
+    <p:sldId id="263" r:id="rId12"/>
+    <p:sldId id="264" r:id="rId13"/>
   </p:sldIdLst>
   <p:sldSz cx="12192000" cy="6858000"/>
   <p:notesSz cx="6858000" cy="9144000"/>
@@ -171,7 +173,7 @@
           <a:noFill/>
           <a:extLst>
             <a:ext uri="{909E8E84-426E-40dd-AFC4-6F175D3DCCD1}">
-              <a14:hiddenFill xmlns:a14="http://schemas.microsoft.com/office/drawing/2010/main" xmlns="">
+              <a14:hiddenFill xmlns="" xmlns:a14="http://schemas.microsoft.com/office/drawing/2010/main">
                 <a:solidFill>
                   <a:srgbClr val="FFFFFF"/>
                 </a:solidFill>
@@ -231,7 +233,7 @@
             </a:ln>
             <a:extLst>
               <a:ext uri="{91240B29-F687-4f45-9708-019B960494DF}">
-                <a14:hiddenLine xmlns:a14="http://schemas.microsoft.com/office/drawing/2010/main" xmlns="" w="9525">
+                <a14:hiddenLine xmlns="" xmlns:a14="http://schemas.microsoft.com/office/drawing/2010/main" w="9525">
                   <a:solidFill>
                     <a:srgbClr val="000000"/>
                   </a:solidFill>
@@ -321,7 +323,7 @@
             </a:ln>
             <a:extLst>
               <a:ext uri="{91240B29-F687-4f45-9708-019B960494DF}">
-                <a14:hiddenLine xmlns:a14="http://schemas.microsoft.com/office/drawing/2010/main" xmlns="" w="9525">
+                <a14:hiddenLine xmlns="" xmlns:a14="http://schemas.microsoft.com/office/drawing/2010/main" w="9525">
                   <a:solidFill>
                     <a:srgbClr val="000000"/>
                   </a:solidFill>
@@ -411,7 +413,7 @@
             </a:ln>
             <a:extLst>
               <a:ext uri="{91240B29-F687-4f45-9708-019B960494DF}">
-                <a14:hiddenLine xmlns:a14="http://schemas.microsoft.com/office/drawing/2010/main" xmlns="" w="9525">
+                <a14:hiddenLine xmlns="" xmlns:a14="http://schemas.microsoft.com/office/drawing/2010/main" w="9525">
                   <a:solidFill>
                     <a:srgbClr val="000000"/>
                   </a:solidFill>
@@ -445,7 +447,7 @@
             </a:ln>
             <a:extLst>
               <a:ext uri="{91240B29-F687-4f45-9708-019B960494DF}">
-                <a14:hiddenLine xmlns:a14="http://schemas.microsoft.com/office/drawing/2010/main" xmlns="" w="9525">
+                <a14:hiddenLine xmlns="" xmlns:a14="http://schemas.microsoft.com/office/drawing/2010/main" w="9525">
                   <a:solidFill>
                     <a:srgbClr val="000000"/>
                   </a:solidFill>
@@ -535,7 +537,7 @@
             </a:ln>
             <a:extLst>
               <a:ext uri="{91240B29-F687-4f45-9708-019B960494DF}">
-                <a14:hiddenLine xmlns:a14="http://schemas.microsoft.com/office/drawing/2010/main" xmlns="" w="9525">
+                <a14:hiddenLine xmlns="" xmlns:a14="http://schemas.microsoft.com/office/drawing/2010/main" w="9525">
                   <a:solidFill>
                     <a:srgbClr val="000000"/>
                   </a:solidFill>
@@ -597,7 +599,7 @@
             </a:ln>
             <a:extLst>
               <a:ext uri="{91240B29-F687-4f45-9708-019B960494DF}">
-                <a14:hiddenLine xmlns:a14="http://schemas.microsoft.com/office/drawing/2010/main" xmlns="" w="9525">
+                <a14:hiddenLine xmlns="" xmlns:a14="http://schemas.microsoft.com/office/drawing/2010/main" w="9525">
                   <a:solidFill>
                     <a:srgbClr val="000000"/>
                   </a:solidFill>
@@ -659,7 +661,7 @@
             </a:ln>
             <a:extLst>
               <a:ext uri="{91240B29-F687-4f45-9708-019B960494DF}">
-                <a14:hiddenLine xmlns:a14="http://schemas.microsoft.com/office/drawing/2010/main" xmlns="" w="9525">
+                <a14:hiddenLine xmlns="" xmlns:a14="http://schemas.microsoft.com/office/drawing/2010/main" w="9525">
                   <a:solidFill>
                     <a:srgbClr val="000000"/>
                   </a:solidFill>
@@ -749,7 +751,7 @@
             </a:ln>
             <a:extLst>
               <a:ext uri="{91240B29-F687-4f45-9708-019B960494DF}">
-                <a14:hiddenLine xmlns:a14="http://schemas.microsoft.com/office/drawing/2010/main" xmlns="" w="9525">
+                <a14:hiddenLine xmlns="" xmlns:a14="http://schemas.microsoft.com/office/drawing/2010/main" w="9525">
                   <a:solidFill>
                     <a:srgbClr val="000000"/>
                   </a:solidFill>
@@ -811,7 +813,7 @@
             </a:ln>
             <a:extLst>
               <a:ext uri="{91240B29-F687-4f45-9708-019B960494DF}">
-                <a14:hiddenLine xmlns:a14="http://schemas.microsoft.com/office/drawing/2010/main" xmlns="" w="9525">
+                <a14:hiddenLine xmlns="" xmlns:a14="http://schemas.microsoft.com/office/drawing/2010/main" w="9525">
                   <a:solidFill>
                     <a:srgbClr val="000000"/>
                   </a:solidFill>
@@ -873,7 +875,7 @@
             </a:ln>
             <a:extLst>
               <a:ext uri="{91240B29-F687-4f45-9708-019B960494DF}">
-                <a14:hiddenLine xmlns:a14="http://schemas.microsoft.com/office/drawing/2010/main" xmlns="" w="9525">
+                <a14:hiddenLine xmlns="" xmlns:a14="http://schemas.microsoft.com/office/drawing/2010/main" w="9525">
                   <a:solidFill>
                     <a:srgbClr val="000000"/>
                   </a:solidFill>
@@ -963,7 +965,7 @@
             </a:ln>
             <a:extLst>
               <a:ext uri="{91240B29-F687-4f45-9708-019B960494DF}">
-                <a14:hiddenLine xmlns:a14="http://schemas.microsoft.com/office/drawing/2010/main" xmlns="" w="9525">
+                <a14:hiddenLine xmlns="" xmlns:a14="http://schemas.microsoft.com/office/drawing/2010/main" w="9525">
                   <a:solidFill>
                     <a:srgbClr val="000000"/>
                   </a:solidFill>
@@ -1053,7 +1055,7 @@
             </a:ln>
             <a:extLst>
               <a:ext uri="{91240B29-F687-4f45-9708-019B960494DF}">
-                <a14:hiddenLine xmlns:a14="http://schemas.microsoft.com/office/drawing/2010/main" xmlns="" w="9525">
+                <a14:hiddenLine xmlns="" xmlns:a14="http://schemas.microsoft.com/office/drawing/2010/main" w="9525">
                   <a:solidFill>
                     <a:srgbClr val="000000"/>
                   </a:solidFill>
@@ -1115,7 +1117,7 @@
             </a:ln>
             <a:extLst>
               <a:ext uri="{91240B29-F687-4f45-9708-019B960494DF}">
-                <a14:hiddenLine xmlns:a14="http://schemas.microsoft.com/office/drawing/2010/main" xmlns="" w="9525">
+                <a14:hiddenLine xmlns="" xmlns:a14="http://schemas.microsoft.com/office/drawing/2010/main" w="9525">
                   <a:solidFill>
                     <a:srgbClr val="000000"/>
                   </a:solidFill>
@@ -1225,7 +1227,7 @@
             </a:ln>
             <a:extLst>
               <a:ext uri="{91240B29-F687-4f45-9708-019B960494DF}">
-                <a14:hiddenLine xmlns:a14="http://schemas.microsoft.com/office/drawing/2010/main" xmlns="" w="9525">
+                <a14:hiddenLine xmlns="" xmlns:a14="http://schemas.microsoft.com/office/drawing/2010/main" w="9525">
                   <a:solidFill>
                     <a:srgbClr val="000000"/>
                   </a:solidFill>
@@ -1287,7 +1289,7 @@
             </a:ln>
             <a:extLst>
               <a:ext uri="{91240B29-F687-4f45-9708-019B960494DF}">
-                <a14:hiddenLine xmlns:a14="http://schemas.microsoft.com/office/drawing/2010/main" xmlns="" w="9525">
+                <a14:hiddenLine xmlns="" xmlns:a14="http://schemas.microsoft.com/office/drawing/2010/main" w="9525">
                   <a:solidFill>
                     <a:srgbClr val="000000"/>
                   </a:solidFill>
@@ -1377,7 +1379,7 @@
             </a:ln>
             <a:extLst>
               <a:ext uri="{91240B29-F687-4f45-9708-019B960494DF}">
-                <a14:hiddenLine xmlns:a14="http://schemas.microsoft.com/office/drawing/2010/main" xmlns="" w="9525">
+                <a14:hiddenLine xmlns="" xmlns:a14="http://schemas.microsoft.com/office/drawing/2010/main" w="9525">
                   <a:solidFill>
                     <a:srgbClr val="000000"/>
                   </a:solidFill>
@@ -1467,7 +1469,7 @@
             </a:ln>
             <a:extLst>
               <a:ext uri="{91240B29-F687-4f45-9708-019B960494DF}">
-                <a14:hiddenLine xmlns:a14="http://schemas.microsoft.com/office/drawing/2010/main" xmlns="" w="9525">
+                <a14:hiddenLine xmlns="" xmlns:a14="http://schemas.microsoft.com/office/drawing/2010/main" w="9525">
                   <a:solidFill>
                     <a:srgbClr val="000000"/>
                   </a:solidFill>
@@ -1529,7 +1531,7 @@
             </a:ln>
             <a:extLst>
               <a:ext uri="{91240B29-F687-4f45-9708-019B960494DF}">
-                <a14:hiddenLine xmlns:a14="http://schemas.microsoft.com/office/drawing/2010/main" xmlns="" w="9525">
+                <a14:hiddenLine xmlns="" xmlns:a14="http://schemas.microsoft.com/office/drawing/2010/main" w="9525">
                   <a:solidFill>
                     <a:srgbClr val="000000"/>
                   </a:solidFill>
@@ -1619,7 +1621,7 @@
             </a:ln>
             <a:extLst>
               <a:ext uri="{91240B29-F687-4f45-9708-019B960494DF}">
-                <a14:hiddenLine xmlns:a14="http://schemas.microsoft.com/office/drawing/2010/main" xmlns="" w="9525">
+                <a14:hiddenLine xmlns="" xmlns:a14="http://schemas.microsoft.com/office/drawing/2010/main" w="9525">
                   <a:solidFill>
                     <a:srgbClr val="000000"/>
                   </a:solidFill>
@@ -1709,7 +1711,7 @@
             </a:ln>
             <a:extLst>
               <a:ext uri="{91240B29-F687-4f45-9708-019B960494DF}">
-                <a14:hiddenLine xmlns:a14="http://schemas.microsoft.com/office/drawing/2010/main" xmlns="" w="9525">
+                <a14:hiddenLine xmlns="" xmlns:a14="http://schemas.microsoft.com/office/drawing/2010/main" w="9525">
                   <a:solidFill>
                     <a:srgbClr val="000000"/>
                   </a:solidFill>
@@ -1765,7 +1767,7 @@
             </a:ln>
             <a:extLst>
               <a:ext uri="{91240B29-F687-4f45-9708-019B960494DF}">
-                <a14:hiddenLine xmlns:a14="http://schemas.microsoft.com/office/drawing/2010/main" xmlns="" w="9525">
+                <a14:hiddenLine xmlns="" xmlns:a14="http://schemas.microsoft.com/office/drawing/2010/main" w="9525">
                   <a:solidFill>
                     <a:srgbClr val="000000"/>
                   </a:solidFill>
@@ -1855,7 +1857,7 @@
             </a:ln>
             <a:extLst>
               <a:ext uri="{91240B29-F687-4f45-9708-019B960494DF}">
-                <a14:hiddenLine xmlns:a14="http://schemas.microsoft.com/office/drawing/2010/main" xmlns="" w="9525">
+                <a14:hiddenLine xmlns="" xmlns:a14="http://schemas.microsoft.com/office/drawing/2010/main" w="9525">
                   <a:solidFill>
                     <a:srgbClr val="000000"/>
                   </a:solidFill>
@@ -1911,7 +1913,7 @@
             </a:ln>
             <a:extLst>
               <a:ext uri="{91240B29-F687-4f45-9708-019B960494DF}">
-                <a14:hiddenLine xmlns:a14="http://schemas.microsoft.com/office/drawing/2010/main" xmlns="" w="9525">
+                <a14:hiddenLine xmlns="" xmlns:a14="http://schemas.microsoft.com/office/drawing/2010/main" w="9525">
                   <a:solidFill>
                     <a:srgbClr val="000000"/>
                   </a:solidFill>
@@ -2001,7 +2003,7 @@
             </a:ln>
             <a:extLst>
               <a:ext uri="{91240B29-F687-4f45-9708-019B960494DF}">
-                <a14:hiddenLine xmlns:a14="http://schemas.microsoft.com/office/drawing/2010/main" xmlns="" w="9525">
+                <a14:hiddenLine xmlns="" xmlns:a14="http://schemas.microsoft.com/office/drawing/2010/main" w="9525">
                   <a:solidFill>
                     <a:srgbClr val="000000"/>
                   </a:solidFill>
@@ -2069,7 +2071,7 @@
             </a:ln>
             <a:extLst>
               <a:ext uri="{91240B29-F687-4f45-9708-019B960494DF}">
-                <a14:hiddenLine xmlns:a14="http://schemas.microsoft.com/office/drawing/2010/main" xmlns="" w="9525">
+                <a14:hiddenLine xmlns="" xmlns:a14="http://schemas.microsoft.com/office/drawing/2010/main" w="9525">
                   <a:solidFill>
                     <a:srgbClr val="000000"/>
                   </a:solidFill>
@@ -2159,7 +2161,7 @@
             </a:ln>
             <a:extLst>
               <a:ext uri="{91240B29-F687-4f45-9708-019B960494DF}">
-                <a14:hiddenLine xmlns:a14="http://schemas.microsoft.com/office/drawing/2010/main" xmlns="" w="9525">
+                <a14:hiddenLine xmlns="" xmlns:a14="http://schemas.microsoft.com/office/drawing/2010/main" w="9525">
                   <a:solidFill>
                     <a:srgbClr val="000000"/>
                   </a:solidFill>
@@ -2227,7 +2229,7 @@
             </a:ln>
             <a:extLst>
               <a:ext uri="{91240B29-F687-4f45-9708-019B960494DF}">
-                <a14:hiddenLine xmlns:a14="http://schemas.microsoft.com/office/drawing/2010/main" xmlns="" w="9525">
+                <a14:hiddenLine xmlns="" xmlns:a14="http://schemas.microsoft.com/office/drawing/2010/main" w="9525">
                   <a:solidFill>
                     <a:srgbClr val="000000"/>
                   </a:solidFill>
@@ -2317,7 +2319,7 @@
             </a:ln>
             <a:extLst>
               <a:ext uri="{91240B29-F687-4f45-9708-019B960494DF}">
-                <a14:hiddenLine xmlns:a14="http://schemas.microsoft.com/office/drawing/2010/main" xmlns="" w="9525">
+                <a14:hiddenLine xmlns="" xmlns:a14="http://schemas.microsoft.com/office/drawing/2010/main" w="9525">
                   <a:solidFill>
                     <a:srgbClr val="000000"/>
                   </a:solidFill>
@@ -2351,7 +2353,7 @@
             </a:ln>
             <a:extLst>
               <a:ext uri="{91240B29-F687-4f45-9708-019B960494DF}">
-                <a14:hiddenLine xmlns:a14="http://schemas.microsoft.com/office/drawing/2010/main" xmlns="" w="9525">
+                <a14:hiddenLine xmlns="" xmlns:a14="http://schemas.microsoft.com/office/drawing/2010/main" w="9525">
                   <a:solidFill>
                     <a:srgbClr val="000000"/>
                   </a:solidFill>
@@ -2441,7 +2443,7 @@
             </a:ln>
             <a:extLst>
               <a:ext uri="{91240B29-F687-4f45-9708-019B960494DF}">
-                <a14:hiddenLine xmlns:a14="http://schemas.microsoft.com/office/drawing/2010/main" xmlns="" w="9525">
+                <a14:hiddenLine xmlns="" xmlns:a14="http://schemas.microsoft.com/office/drawing/2010/main" w="9525">
                   <a:solidFill>
                     <a:srgbClr val="000000"/>
                   </a:solidFill>
@@ -2503,7 +2505,7 @@
             </a:ln>
             <a:extLst>
               <a:ext uri="{91240B29-F687-4f45-9708-019B960494DF}">
-                <a14:hiddenLine xmlns:a14="http://schemas.microsoft.com/office/drawing/2010/main" xmlns="" w="9525">
+                <a14:hiddenLine xmlns="" xmlns:a14="http://schemas.microsoft.com/office/drawing/2010/main" w="9525">
                   <a:solidFill>
                     <a:srgbClr val="000000"/>
                   </a:solidFill>
@@ -2565,7 +2567,7 @@
             </a:ln>
             <a:extLst>
               <a:ext uri="{91240B29-F687-4f45-9708-019B960494DF}">
-                <a14:hiddenLine xmlns:a14="http://schemas.microsoft.com/office/drawing/2010/main" xmlns="" w="9525">
+                <a14:hiddenLine xmlns="" xmlns:a14="http://schemas.microsoft.com/office/drawing/2010/main" w="9525">
                   <a:solidFill>
                     <a:srgbClr val="000000"/>
                   </a:solidFill>
@@ -2655,7 +2657,7 @@
             </a:ln>
             <a:extLst>
               <a:ext uri="{91240B29-F687-4f45-9708-019B960494DF}">
-                <a14:hiddenLine xmlns:a14="http://schemas.microsoft.com/office/drawing/2010/main" xmlns="" w="9525">
+                <a14:hiddenLine xmlns="" xmlns:a14="http://schemas.microsoft.com/office/drawing/2010/main" w="9525">
                   <a:solidFill>
                     <a:srgbClr val="000000"/>
                   </a:solidFill>
@@ -2723,7 +2725,7 @@
             </a:ln>
             <a:extLst>
               <a:ext uri="{91240B29-F687-4f45-9708-019B960494DF}">
-                <a14:hiddenLine xmlns:a14="http://schemas.microsoft.com/office/drawing/2010/main" xmlns="" w="9525">
+                <a14:hiddenLine xmlns="" xmlns:a14="http://schemas.microsoft.com/office/drawing/2010/main" w="9525">
                   <a:solidFill>
                     <a:srgbClr val="000000"/>
                   </a:solidFill>
@@ -2785,7 +2787,7 @@
             </a:ln>
             <a:extLst>
               <a:ext uri="{91240B29-F687-4f45-9708-019B960494DF}">
-                <a14:hiddenLine xmlns:a14="http://schemas.microsoft.com/office/drawing/2010/main" xmlns="" w="9525">
+                <a14:hiddenLine xmlns="" xmlns:a14="http://schemas.microsoft.com/office/drawing/2010/main" w="9525">
                   <a:solidFill>
                     <a:srgbClr val="000000"/>
                   </a:solidFill>
@@ -2875,7 +2877,7 @@
             </a:ln>
             <a:extLst>
               <a:ext uri="{91240B29-F687-4f45-9708-019B960494DF}">
-                <a14:hiddenLine xmlns:a14="http://schemas.microsoft.com/office/drawing/2010/main" xmlns="" w="9525">
+                <a14:hiddenLine xmlns="" xmlns:a14="http://schemas.microsoft.com/office/drawing/2010/main" w="9525">
                   <a:solidFill>
                     <a:srgbClr val="000000"/>
                   </a:solidFill>
@@ -2937,7 +2939,7 @@
             </a:ln>
             <a:extLst>
               <a:ext uri="{91240B29-F687-4f45-9708-019B960494DF}">
-                <a14:hiddenLine xmlns:a14="http://schemas.microsoft.com/office/drawing/2010/main" xmlns="" w="9525">
+                <a14:hiddenLine xmlns="" xmlns:a14="http://schemas.microsoft.com/office/drawing/2010/main" w="9525">
                   <a:solidFill>
                     <a:srgbClr val="000000"/>
                   </a:solidFill>
@@ -3027,7 +3029,7 @@
             </a:ln>
             <a:extLst>
               <a:ext uri="{91240B29-F687-4f45-9708-019B960494DF}">
-                <a14:hiddenLine xmlns:a14="http://schemas.microsoft.com/office/drawing/2010/main" xmlns="" w="9525">
+                <a14:hiddenLine xmlns="" xmlns:a14="http://schemas.microsoft.com/office/drawing/2010/main" w="9525">
                   <a:solidFill>
                     <a:srgbClr val="000000"/>
                   </a:solidFill>
@@ -3089,7 +3091,7 @@
             </a:ln>
             <a:extLst>
               <a:ext uri="{91240B29-F687-4f45-9708-019B960494DF}">
-                <a14:hiddenLine xmlns:a14="http://schemas.microsoft.com/office/drawing/2010/main" xmlns="" w="9525">
+                <a14:hiddenLine xmlns="" xmlns:a14="http://schemas.microsoft.com/office/drawing/2010/main" w="9525">
                   <a:solidFill>
                     <a:srgbClr val="000000"/>
                   </a:solidFill>
@@ -3179,7 +3181,7 @@
             </a:ln>
             <a:extLst>
               <a:ext uri="{91240B29-F687-4f45-9708-019B960494DF}">
-                <a14:hiddenLine xmlns:a14="http://schemas.microsoft.com/office/drawing/2010/main" xmlns="" w="9525">
+                <a14:hiddenLine xmlns="" xmlns:a14="http://schemas.microsoft.com/office/drawing/2010/main" w="9525">
                   <a:solidFill>
                     <a:srgbClr val="000000"/>
                   </a:solidFill>
@@ -3213,7 +3215,7 @@
             </a:ln>
             <a:extLst>
               <a:ext uri="{91240B29-F687-4f45-9708-019B960494DF}">
-                <a14:hiddenLine xmlns:a14="http://schemas.microsoft.com/office/drawing/2010/main" xmlns="" w="9525">
+                <a14:hiddenLine xmlns="" xmlns:a14="http://schemas.microsoft.com/office/drawing/2010/main" w="9525">
                   <a:solidFill>
                     <a:srgbClr val="000000"/>
                   </a:solidFill>
@@ -3278,7 +3280,7 @@
             </a:ln>
             <a:extLst>
               <a:ext uri="{91240B29-F687-4f45-9708-019B960494DF}">
-                <a14:hiddenLine xmlns:a14="http://schemas.microsoft.com/office/drawing/2010/main" xmlns="" w="9525">
+                <a14:hiddenLine xmlns="" xmlns:a14="http://schemas.microsoft.com/office/drawing/2010/main" w="9525">
                   <a:solidFill>
                     <a:srgbClr val="000000"/>
                   </a:solidFill>
@@ -3368,7 +3370,7 @@
             </a:ln>
             <a:extLst>
               <a:ext uri="{91240B29-F687-4f45-9708-019B960494DF}">
-                <a14:hiddenLine xmlns:a14="http://schemas.microsoft.com/office/drawing/2010/main" xmlns="" w="9525">
+                <a14:hiddenLine xmlns="" xmlns:a14="http://schemas.microsoft.com/office/drawing/2010/main" w="9525">
                   <a:solidFill>
                     <a:srgbClr val="000000"/>
                   </a:solidFill>
@@ -3430,7 +3432,7 @@
             </a:ln>
             <a:extLst>
               <a:ext uri="{91240B29-F687-4f45-9708-019B960494DF}">
-                <a14:hiddenLine xmlns:a14="http://schemas.microsoft.com/office/drawing/2010/main" xmlns="" w="9525">
+                <a14:hiddenLine xmlns="" xmlns:a14="http://schemas.microsoft.com/office/drawing/2010/main" w="9525">
                   <a:solidFill>
                     <a:srgbClr val="000000"/>
                   </a:solidFill>
@@ -3520,7 +3522,7 @@
             </a:ln>
             <a:extLst>
               <a:ext uri="{91240B29-F687-4f45-9708-019B960494DF}">
-                <a14:hiddenLine xmlns:a14="http://schemas.microsoft.com/office/drawing/2010/main" xmlns="" w="9525">
+                <a14:hiddenLine xmlns="" xmlns:a14="http://schemas.microsoft.com/office/drawing/2010/main" w="9525">
                   <a:solidFill>
                     <a:srgbClr val="000000"/>
                   </a:solidFill>
@@ -3610,7 +3612,7 @@
             </a:ln>
             <a:extLst>
               <a:ext uri="{91240B29-F687-4f45-9708-019B960494DF}">
-                <a14:hiddenLine xmlns:a14="http://schemas.microsoft.com/office/drawing/2010/main" xmlns="" w="9525">
+                <a14:hiddenLine xmlns="" xmlns:a14="http://schemas.microsoft.com/office/drawing/2010/main" w="9525">
                   <a:solidFill>
                     <a:srgbClr val="000000"/>
                   </a:solidFill>
@@ -3675,7 +3677,7 @@
             </a:ln>
             <a:extLst>
               <a:ext uri="{91240B29-F687-4f45-9708-019B960494DF}">
-                <a14:hiddenLine xmlns:a14="http://schemas.microsoft.com/office/drawing/2010/main" xmlns="" w="9525">
+                <a14:hiddenLine xmlns="" xmlns:a14="http://schemas.microsoft.com/office/drawing/2010/main" w="9525">
                   <a:solidFill>
                     <a:srgbClr val="000000"/>
                   </a:solidFill>
@@ -3737,7 +3739,7 @@
             </a:ln>
             <a:extLst>
               <a:ext uri="{91240B29-F687-4f45-9708-019B960494DF}">
-                <a14:hiddenLine xmlns:a14="http://schemas.microsoft.com/office/drawing/2010/main" xmlns="" w="9525">
+                <a14:hiddenLine xmlns="" xmlns:a14="http://schemas.microsoft.com/office/drawing/2010/main" w="9525">
                   <a:solidFill>
                     <a:srgbClr val="000000"/>
                   </a:solidFill>
@@ -3827,7 +3829,7 @@
             </a:ln>
             <a:extLst>
               <a:ext uri="{91240B29-F687-4f45-9708-019B960494DF}">
-                <a14:hiddenLine xmlns:a14="http://schemas.microsoft.com/office/drawing/2010/main" xmlns="" w="9525">
+                <a14:hiddenLine xmlns="" xmlns:a14="http://schemas.microsoft.com/office/drawing/2010/main" w="9525">
                   <a:solidFill>
                     <a:srgbClr val="000000"/>
                   </a:solidFill>
@@ -3917,7 +3919,7 @@
             </a:ln>
             <a:extLst>
               <a:ext uri="{91240B29-F687-4f45-9708-019B960494DF}">
-                <a14:hiddenLine xmlns:a14="http://schemas.microsoft.com/office/drawing/2010/main" xmlns="" w="9525">
+                <a14:hiddenLine xmlns="" xmlns:a14="http://schemas.microsoft.com/office/drawing/2010/main" w="9525">
                   <a:solidFill>
                     <a:srgbClr val="000000"/>
                   </a:solidFill>
@@ -3979,7 +3981,7 @@
             </a:ln>
             <a:extLst>
               <a:ext uri="{91240B29-F687-4f45-9708-019B960494DF}">
-                <a14:hiddenLine xmlns:a14="http://schemas.microsoft.com/office/drawing/2010/main" xmlns="" w="9525">
+                <a14:hiddenLine xmlns="" xmlns:a14="http://schemas.microsoft.com/office/drawing/2010/main" w="9525">
                   <a:solidFill>
                     <a:srgbClr val="000000"/>
                   </a:solidFill>
@@ -4099,7 +4101,7 @@
             </a:ln>
             <a:extLst>
               <a:ext uri="{91240B29-F687-4f45-9708-019B960494DF}">
-                <a14:hiddenLine xmlns:a14="http://schemas.microsoft.com/office/drawing/2010/main" xmlns="" w="9525">
+                <a14:hiddenLine xmlns="" xmlns:a14="http://schemas.microsoft.com/office/drawing/2010/main" w="9525">
                   <a:solidFill>
                     <a:srgbClr val="000000"/>
                   </a:solidFill>
@@ -4167,7 +4169,7 @@
             </a:ln>
             <a:extLst>
               <a:ext uri="{91240B29-F687-4f45-9708-019B960494DF}">
-                <a14:hiddenLine xmlns:a14="http://schemas.microsoft.com/office/drawing/2010/main" xmlns="" w="9525">
+                <a14:hiddenLine xmlns="" xmlns:a14="http://schemas.microsoft.com/office/drawing/2010/main" w="9525">
                   <a:solidFill>
                     <a:srgbClr val="000000"/>
                   </a:solidFill>
@@ -4257,7 +4259,7 @@
             </a:ln>
             <a:extLst>
               <a:ext uri="{91240B29-F687-4f45-9708-019B960494DF}">
-                <a14:hiddenLine xmlns:a14="http://schemas.microsoft.com/office/drawing/2010/main" xmlns="" w="9525">
+                <a14:hiddenLine xmlns="" xmlns:a14="http://schemas.microsoft.com/office/drawing/2010/main" w="9525">
                   <a:solidFill>
                     <a:srgbClr val="000000"/>
                   </a:solidFill>
@@ -4397,7 +4399,7 @@
           <a:p>
             <a:fld id="{48A87A34-81AB-432B-8DAE-1953F412C126}" type="datetimeFigureOut">
               <a:rPr lang="en-US" dirty="0"/>
-              <a:t>5/3/2026</a:t>
+              <a:t>5/4/2026</a:t>
             </a:fld>
             <a:endParaRPr lang="en-US" dirty="0"/>
           </a:p>
@@ -4659,7 +4661,7 @@
           <a:p>
             <a:fld id="{48A87A34-81AB-432B-8DAE-1953F412C126}" type="datetimeFigureOut">
               <a:rPr lang="en-US" dirty="0"/>
-              <a:t>5/3/2026</a:t>
+              <a:t>5/4/2026</a:t>
             </a:fld>
             <a:endParaRPr lang="en-US" dirty="0"/>
           </a:p>
@@ -4850,7 +4852,7 @@
           <a:p>
             <a:fld id="{48A87A34-81AB-432B-8DAE-1953F412C126}" type="datetimeFigureOut">
               <a:rPr lang="en-US" dirty="0"/>
-              <a:t>5/3/2026</a:t>
+              <a:t>5/4/2026</a:t>
             </a:fld>
             <a:endParaRPr lang="en-US" dirty="0"/>
           </a:p>
@@ -5108,7 +5110,7 @@
           <a:p>
             <a:fld id="{48A87A34-81AB-432B-8DAE-1953F412C126}" type="datetimeFigureOut">
               <a:rPr lang="en-US" dirty="0"/>
-              <a:t>5/3/2026</a:t>
+              <a:t>5/4/2026</a:t>
             </a:fld>
             <a:endParaRPr lang="en-US" dirty="0"/>
           </a:p>
@@ -5537,7 +5539,7 @@
           <a:p>
             <a:fld id="{48A87A34-81AB-432B-8DAE-1953F412C126}" type="datetimeFigureOut">
               <a:rPr lang="en-US" dirty="0"/>
-              <a:t>5/3/2026</a:t>
+              <a:t>5/4/2026</a:t>
             </a:fld>
             <a:endParaRPr lang="en-US" dirty="0"/>
           </a:p>
@@ -6078,7 +6080,7 @@
           <a:p>
             <a:fld id="{48A87A34-81AB-432B-8DAE-1953F412C126}" type="datetimeFigureOut">
               <a:rPr lang="en-US" dirty="0"/>
-              <a:t>5/3/2026</a:t>
+              <a:t>5/4/2026</a:t>
             </a:fld>
             <a:endParaRPr lang="en-US" dirty="0"/>
           </a:p>
@@ -6793,7 +6795,7 @@
           <a:p>
             <a:fld id="{48A87A34-81AB-432B-8DAE-1953F412C126}" type="datetimeFigureOut">
               <a:rPr lang="en-US" dirty="0"/>
-              <a:t>5/3/2026</a:t>
+              <a:t>5/4/2026</a:t>
             </a:fld>
             <a:endParaRPr lang="en-US" dirty="0"/>
           </a:p>
@@ -6958,7 +6960,7 @@
           <a:p>
             <a:fld id="{48A87A34-81AB-432B-8DAE-1953F412C126}" type="datetimeFigureOut">
               <a:rPr lang="en-US" dirty="0"/>
-              <a:t>5/3/2026</a:t>
+              <a:t>5/4/2026</a:t>
             </a:fld>
             <a:endParaRPr lang="en-US" dirty="0"/>
           </a:p>
@@ -7133,7 +7135,7 @@
           <a:p>
             <a:fld id="{48A87A34-81AB-432B-8DAE-1953F412C126}" type="datetimeFigureOut">
               <a:rPr lang="en-US" dirty="0"/>
-              <a:t>5/3/2026</a:t>
+              <a:t>5/4/2026</a:t>
             </a:fld>
             <a:endParaRPr lang="en-US" dirty="0"/>
           </a:p>
@@ -7298,7 +7300,7 @@
           <a:p>
             <a:fld id="{48A87A34-81AB-432B-8DAE-1953F412C126}" type="datetimeFigureOut">
               <a:rPr lang="en-US" dirty="0"/>
-              <a:t>5/3/2026</a:t>
+              <a:t>5/4/2026</a:t>
             </a:fld>
             <a:endParaRPr lang="en-US" dirty="0"/>
           </a:p>
@@ -7543,7 +7545,7 @@
           <a:p>
             <a:fld id="{48A87A34-81AB-432B-8DAE-1953F412C126}" type="datetimeFigureOut">
               <a:rPr lang="en-US" dirty="0"/>
-              <a:t>5/3/2026</a:t>
+              <a:t>5/4/2026</a:t>
             </a:fld>
             <a:endParaRPr lang="en-US" dirty="0"/>
           </a:p>
@@ -7770,7 +7772,7 @@
           <a:p>
             <a:fld id="{48A87A34-81AB-432B-8DAE-1953F412C126}" type="datetimeFigureOut">
               <a:rPr lang="en-US" dirty="0"/>
-              <a:t>5/3/2026</a:t>
+              <a:t>5/4/2026</a:t>
             </a:fld>
             <a:endParaRPr lang="en-US" dirty="0"/>
           </a:p>
@@ -8146,7 +8148,7 @@
           <a:p>
             <a:fld id="{48A87A34-81AB-432B-8DAE-1953F412C126}" type="datetimeFigureOut">
               <a:rPr lang="en-US" dirty="0"/>
-              <a:t>5/3/2026</a:t>
+              <a:t>5/4/2026</a:t>
             </a:fld>
             <a:endParaRPr lang="en-US" dirty="0"/>
           </a:p>
@@ -8259,7 +8261,7 @@
           <a:p>
             <a:fld id="{48A87A34-81AB-432B-8DAE-1953F412C126}" type="datetimeFigureOut">
               <a:rPr lang="en-US" dirty="0"/>
-              <a:t>5/3/2026</a:t>
+              <a:t>5/4/2026</a:t>
             </a:fld>
             <a:endParaRPr lang="en-US" dirty="0"/>
           </a:p>
@@ -8349,7 +8351,7 @@
           <a:p>
             <a:fld id="{48A87A34-81AB-432B-8DAE-1953F412C126}" type="datetimeFigureOut">
               <a:rPr lang="en-US" dirty="0"/>
-              <a:t>5/3/2026</a:t>
+              <a:t>5/4/2026</a:t>
             </a:fld>
             <a:endParaRPr lang="en-US" dirty="0"/>
           </a:p>
@@ -8593,7 +8595,7 @@
           <a:p>
             <a:fld id="{48A87A34-81AB-432B-8DAE-1953F412C126}" type="datetimeFigureOut">
               <a:rPr lang="en-US" dirty="0"/>
-              <a:t>5/3/2026</a:t>
+              <a:t>5/4/2026</a:t>
             </a:fld>
             <a:endParaRPr lang="en-US" dirty="0"/>
           </a:p>
@@ -8868,7 +8870,7 @@
           <a:p>
             <a:fld id="{48A87A34-81AB-432B-8DAE-1953F412C126}" type="datetimeFigureOut">
               <a:rPr lang="en-US" dirty="0"/>
-              <a:t>5/3/2026</a:t>
+              <a:t>5/4/2026</a:t>
             </a:fld>
             <a:endParaRPr lang="en-US" dirty="0"/>
           </a:p>
@@ -8979,7 +8981,7 @@
           <a:noFill/>
           <a:extLst>
             <a:ext uri="{909E8E84-426E-40dd-AFC4-6F175D3DCCD1}">
-              <a14:hiddenFill xmlns:a14="http://schemas.microsoft.com/office/drawing/2010/main" xmlns="">
+              <a14:hiddenFill xmlns="" xmlns:a14="http://schemas.microsoft.com/office/drawing/2010/main">
                 <a:solidFill>
                   <a:srgbClr val="FFFFFF"/>
                 </a:solidFill>
@@ -9053,7 +9055,7 @@
               </a:ln>
               <a:extLst>
                 <a:ext uri="{91240B29-F687-4f45-9708-019B960494DF}">
-                  <a14:hiddenLine xmlns:a14="http://schemas.microsoft.com/office/drawing/2010/main" xmlns="" w="9525">
+                  <a14:hiddenLine xmlns="" xmlns:a14="http://schemas.microsoft.com/office/drawing/2010/main" w="9525">
                     <a:solidFill>
                       <a:srgbClr val="000000"/>
                     </a:solidFill>
@@ -9143,7 +9145,7 @@
               </a:ln>
               <a:extLst>
                 <a:ext uri="{91240B29-F687-4f45-9708-019B960494DF}">
-                  <a14:hiddenLine xmlns:a14="http://schemas.microsoft.com/office/drawing/2010/main" xmlns="" w="9525">
+                  <a14:hiddenLine xmlns="" xmlns:a14="http://schemas.microsoft.com/office/drawing/2010/main" w="9525">
                     <a:solidFill>
                       <a:srgbClr val="000000"/>
                     </a:solidFill>
@@ -9233,7 +9235,7 @@
               </a:ln>
               <a:extLst>
                 <a:ext uri="{91240B29-F687-4f45-9708-019B960494DF}">
-                  <a14:hiddenLine xmlns:a14="http://schemas.microsoft.com/office/drawing/2010/main" xmlns="" w="9525">
+                  <a14:hiddenLine xmlns="" xmlns:a14="http://schemas.microsoft.com/office/drawing/2010/main" w="9525">
                     <a:solidFill>
                       <a:srgbClr val="000000"/>
                     </a:solidFill>
@@ -9295,7 +9297,7 @@
               </a:ln>
               <a:extLst>
                 <a:ext uri="{91240B29-F687-4f45-9708-019B960494DF}">
-                  <a14:hiddenLine xmlns:a14="http://schemas.microsoft.com/office/drawing/2010/main" xmlns="" w="9525">
+                  <a14:hiddenLine xmlns="" xmlns:a14="http://schemas.microsoft.com/office/drawing/2010/main" w="9525">
                     <a:solidFill>
                       <a:srgbClr val="000000"/>
                     </a:solidFill>
@@ -9385,7 +9387,7 @@
               </a:ln>
               <a:extLst>
                 <a:ext uri="{91240B29-F687-4f45-9708-019B960494DF}">
-                  <a14:hiddenLine xmlns:a14="http://schemas.microsoft.com/office/drawing/2010/main" xmlns="" w="9525">
+                  <a14:hiddenLine xmlns="" xmlns:a14="http://schemas.microsoft.com/office/drawing/2010/main" w="9525">
                     <a:solidFill>
                       <a:srgbClr val="000000"/>
                     </a:solidFill>
@@ -9447,7 +9449,7 @@
               </a:ln>
               <a:extLst>
                 <a:ext uri="{91240B29-F687-4f45-9708-019B960494DF}">
-                  <a14:hiddenLine xmlns:a14="http://schemas.microsoft.com/office/drawing/2010/main" xmlns="" w="9525">
+                  <a14:hiddenLine xmlns="" xmlns:a14="http://schemas.microsoft.com/office/drawing/2010/main" w="9525">
                     <a:solidFill>
                       <a:srgbClr val="000000"/>
                     </a:solidFill>
@@ -9509,7 +9511,7 @@
               </a:ln>
               <a:extLst>
                 <a:ext uri="{91240B29-F687-4f45-9708-019B960494DF}">
-                  <a14:hiddenLine xmlns:a14="http://schemas.microsoft.com/office/drawing/2010/main" xmlns="" w="9525">
+                  <a14:hiddenLine xmlns="" xmlns:a14="http://schemas.microsoft.com/office/drawing/2010/main" w="9525">
                     <a:solidFill>
                       <a:srgbClr val="000000"/>
                     </a:solidFill>
@@ -9599,7 +9601,7 @@
               </a:ln>
               <a:extLst>
                 <a:ext uri="{91240B29-F687-4f45-9708-019B960494DF}">
-                  <a14:hiddenLine xmlns:a14="http://schemas.microsoft.com/office/drawing/2010/main" xmlns="" w="9525">
+                  <a14:hiddenLine xmlns="" xmlns:a14="http://schemas.microsoft.com/office/drawing/2010/main" w="9525">
                     <a:solidFill>
                       <a:srgbClr val="000000"/>
                     </a:solidFill>
@@ -9689,7 +9691,7 @@
               </a:ln>
               <a:extLst>
                 <a:ext uri="{91240B29-F687-4f45-9708-019B960494DF}">
-                  <a14:hiddenLine xmlns:a14="http://schemas.microsoft.com/office/drawing/2010/main" xmlns="" w="9525">
+                  <a14:hiddenLine xmlns="" xmlns:a14="http://schemas.microsoft.com/office/drawing/2010/main" w="9525">
                     <a:solidFill>
                       <a:srgbClr val="000000"/>
                     </a:solidFill>
@@ -9751,7 +9753,7 @@
               </a:ln>
               <a:extLst>
                 <a:ext uri="{91240B29-F687-4f45-9708-019B960494DF}">
-                  <a14:hiddenLine xmlns:a14="http://schemas.microsoft.com/office/drawing/2010/main" xmlns="" w="9525">
+                  <a14:hiddenLine xmlns="" xmlns:a14="http://schemas.microsoft.com/office/drawing/2010/main" w="9525">
                     <a:solidFill>
                       <a:srgbClr val="000000"/>
                     </a:solidFill>
@@ -9861,7 +9863,7 @@
               </a:ln>
               <a:extLst>
                 <a:ext uri="{91240B29-F687-4f45-9708-019B960494DF}">
-                  <a14:hiddenLine xmlns:a14="http://schemas.microsoft.com/office/drawing/2010/main" xmlns="" w="9525">
+                  <a14:hiddenLine xmlns="" xmlns:a14="http://schemas.microsoft.com/office/drawing/2010/main" w="9525">
                     <a:solidFill>
                       <a:srgbClr val="000000"/>
                     </a:solidFill>
@@ -9945,7 +9947,7 @@
               </a:ln>
               <a:extLst>
                 <a:ext uri="{91240B29-F687-4f45-9708-019B960494DF}">
-                  <a14:hiddenLine xmlns:a14="http://schemas.microsoft.com/office/drawing/2010/main" xmlns="" w="9525">
+                  <a14:hiddenLine xmlns="" xmlns:a14="http://schemas.microsoft.com/office/drawing/2010/main" w="9525">
                     <a:solidFill>
                       <a:srgbClr val="000000"/>
                     </a:solidFill>
@@ -10007,7 +10009,7 @@
               </a:ln>
               <a:extLst>
                 <a:ext uri="{91240B29-F687-4f45-9708-019B960494DF}">
-                  <a14:hiddenLine xmlns:a14="http://schemas.microsoft.com/office/drawing/2010/main" xmlns="" w="9525">
+                  <a14:hiddenLine xmlns="" xmlns:a14="http://schemas.microsoft.com/office/drawing/2010/main" w="9525">
                     <a:solidFill>
                       <a:srgbClr val="000000"/>
                     </a:solidFill>
@@ -10069,7 +10071,7 @@
               </a:ln>
               <a:extLst>
                 <a:ext uri="{91240B29-F687-4f45-9708-019B960494DF}">
-                  <a14:hiddenLine xmlns:a14="http://schemas.microsoft.com/office/drawing/2010/main" xmlns="" w="9525">
+                  <a14:hiddenLine xmlns="" xmlns:a14="http://schemas.microsoft.com/office/drawing/2010/main" w="9525">
                     <a:solidFill>
                       <a:srgbClr val="000000"/>
                     </a:solidFill>
@@ -10159,7 +10161,7 @@
               </a:ln>
               <a:extLst>
                 <a:ext uri="{91240B29-F687-4f45-9708-019B960494DF}">
-                  <a14:hiddenLine xmlns:a14="http://schemas.microsoft.com/office/drawing/2010/main" xmlns="" w="9525">
+                  <a14:hiddenLine xmlns="" xmlns:a14="http://schemas.microsoft.com/office/drawing/2010/main" w="9525">
                     <a:solidFill>
                       <a:srgbClr val="000000"/>
                     </a:solidFill>
@@ -10193,7 +10195,7 @@
               </a:ln>
               <a:extLst>
                 <a:ext uri="{91240B29-F687-4f45-9708-019B960494DF}">
-                  <a14:hiddenLine xmlns:a14="http://schemas.microsoft.com/office/drawing/2010/main" xmlns="" w="9525">
+                  <a14:hiddenLine xmlns="" xmlns:a14="http://schemas.microsoft.com/office/drawing/2010/main" w="9525">
                     <a:solidFill>
                       <a:srgbClr val="000000"/>
                     </a:solidFill>
@@ -10258,7 +10260,7 @@
               </a:ln>
               <a:extLst>
                 <a:ext uri="{91240B29-F687-4f45-9708-019B960494DF}">
-                  <a14:hiddenLine xmlns:a14="http://schemas.microsoft.com/office/drawing/2010/main" xmlns="" w="9525">
+                  <a14:hiddenLine xmlns="" xmlns:a14="http://schemas.microsoft.com/office/drawing/2010/main" w="9525">
                     <a:solidFill>
                       <a:srgbClr val="000000"/>
                     </a:solidFill>
@@ -10348,7 +10350,7 @@
               </a:ln>
               <a:extLst>
                 <a:ext uri="{91240B29-F687-4f45-9708-019B960494DF}">
-                  <a14:hiddenLine xmlns:a14="http://schemas.microsoft.com/office/drawing/2010/main" xmlns="" w="9525">
+                  <a14:hiddenLine xmlns="" xmlns:a14="http://schemas.microsoft.com/office/drawing/2010/main" w="9525">
                     <a:solidFill>
                       <a:srgbClr val="000000"/>
                     </a:solidFill>
@@ -10410,7 +10412,7 @@
               </a:ln>
               <a:extLst>
                 <a:ext uri="{91240B29-F687-4f45-9708-019B960494DF}">
-                  <a14:hiddenLine xmlns:a14="http://schemas.microsoft.com/office/drawing/2010/main" xmlns="" w="9525">
+                  <a14:hiddenLine xmlns="" xmlns:a14="http://schemas.microsoft.com/office/drawing/2010/main" w="9525">
                     <a:solidFill>
                       <a:srgbClr val="000000"/>
                     </a:solidFill>
@@ -10500,7 +10502,7 @@
               </a:ln>
               <a:extLst>
                 <a:ext uri="{91240B29-F687-4f45-9708-019B960494DF}">
-                  <a14:hiddenLine xmlns:a14="http://schemas.microsoft.com/office/drawing/2010/main" xmlns="" w="9525">
+                  <a14:hiddenLine xmlns="" xmlns:a14="http://schemas.microsoft.com/office/drawing/2010/main" w="9525">
                     <a:solidFill>
                       <a:srgbClr val="000000"/>
                     </a:solidFill>
@@ -10565,7 +10567,7 @@
               </a:ln>
               <a:extLst>
                 <a:ext uri="{91240B29-F687-4f45-9708-019B960494DF}">
-                  <a14:hiddenLine xmlns:a14="http://schemas.microsoft.com/office/drawing/2010/main" xmlns="" w="9525">
+                  <a14:hiddenLine xmlns="" xmlns:a14="http://schemas.microsoft.com/office/drawing/2010/main" w="9525">
                     <a:solidFill>
                       <a:srgbClr val="000000"/>
                     </a:solidFill>
@@ -10627,7 +10629,7 @@
               </a:ln>
               <a:extLst>
                 <a:ext uri="{91240B29-F687-4f45-9708-019B960494DF}">
-                  <a14:hiddenLine xmlns:a14="http://schemas.microsoft.com/office/drawing/2010/main" xmlns="" w="9525">
+                  <a14:hiddenLine xmlns="" xmlns:a14="http://schemas.microsoft.com/office/drawing/2010/main" w="9525">
                     <a:solidFill>
                       <a:srgbClr val="000000"/>
                     </a:solidFill>
@@ -10717,7 +10719,7 @@
               </a:ln>
               <a:extLst>
                 <a:ext uri="{91240B29-F687-4f45-9708-019B960494DF}">
-                  <a14:hiddenLine xmlns:a14="http://schemas.microsoft.com/office/drawing/2010/main" xmlns="" w="9525">
+                  <a14:hiddenLine xmlns="" xmlns:a14="http://schemas.microsoft.com/office/drawing/2010/main" w="9525">
                     <a:solidFill>
                       <a:srgbClr val="000000"/>
                     </a:solidFill>
@@ -10807,7 +10809,7 @@
               </a:ln>
               <a:extLst>
                 <a:ext uri="{91240B29-F687-4f45-9708-019B960494DF}">
-                  <a14:hiddenLine xmlns:a14="http://schemas.microsoft.com/office/drawing/2010/main" xmlns="" w="9525">
+                  <a14:hiddenLine xmlns="" xmlns:a14="http://schemas.microsoft.com/office/drawing/2010/main" w="9525">
                     <a:solidFill>
                       <a:srgbClr val="000000"/>
                     </a:solidFill>
@@ -10872,7 +10874,7 @@
               </a:ln>
               <a:extLst>
                 <a:ext uri="{91240B29-F687-4f45-9708-019B960494DF}">
-                  <a14:hiddenLine xmlns:a14="http://schemas.microsoft.com/office/drawing/2010/main" xmlns="" w="9525">
+                  <a14:hiddenLine xmlns="" xmlns:a14="http://schemas.microsoft.com/office/drawing/2010/main" w="9525">
                     <a:solidFill>
                       <a:srgbClr val="000000"/>
                     </a:solidFill>
@@ -10992,7 +10994,7 @@
               </a:ln>
               <a:extLst>
                 <a:ext uri="{91240B29-F687-4f45-9708-019B960494DF}">
-                  <a14:hiddenLine xmlns:a14="http://schemas.microsoft.com/office/drawing/2010/main" xmlns="" w="9525">
+                  <a14:hiddenLine xmlns="" xmlns:a14="http://schemas.microsoft.com/office/drawing/2010/main" w="9525">
                     <a:solidFill>
                       <a:srgbClr val="000000"/>
                     </a:solidFill>
@@ -11090,7 +11092,7 @@
               </a:ln>
               <a:extLst>
                 <a:ext uri="{91240B29-F687-4f45-9708-019B960494DF}">
-                  <a14:hiddenLine xmlns:a14="http://schemas.microsoft.com/office/drawing/2010/main" xmlns="" w="9525">
+                  <a14:hiddenLine xmlns="" xmlns:a14="http://schemas.microsoft.com/office/drawing/2010/main" w="9525">
                     <a:solidFill>
                       <a:srgbClr val="000000"/>
                     </a:solidFill>
@@ -11205,7 +11207,7 @@
               </a:ln>
               <a:extLst>
                 <a:ext uri="{91240B29-F687-4f45-9708-019B960494DF}">
-                  <a14:hiddenLine xmlns:a14="http://schemas.microsoft.com/office/drawing/2010/main" xmlns="" w="9525">
+                  <a14:hiddenLine xmlns="" xmlns:a14="http://schemas.microsoft.com/office/drawing/2010/main" w="9525">
                     <a:solidFill>
                       <a:srgbClr val="000000"/>
                     </a:solidFill>
@@ -11295,7 +11297,7 @@
               </a:ln>
               <a:extLst>
                 <a:ext uri="{91240B29-F687-4f45-9708-019B960494DF}">
-                  <a14:hiddenLine xmlns:a14="http://schemas.microsoft.com/office/drawing/2010/main" xmlns="" w="9525">
+                  <a14:hiddenLine xmlns="" xmlns:a14="http://schemas.microsoft.com/office/drawing/2010/main" w="9525">
                     <a:solidFill>
                       <a:srgbClr val="000000"/>
                     </a:solidFill>
@@ -11360,7 +11362,7 @@
               </a:ln>
               <a:extLst>
                 <a:ext uri="{91240B29-F687-4f45-9708-019B960494DF}">
-                  <a14:hiddenLine xmlns:a14="http://schemas.microsoft.com/office/drawing/2010/main" xmlns="" w="9525">
+                  <a14:hiddenLine xmlns="" xmlns:a14="http://schemas.microsoft.com/office/drawing/2010/main" w="9525">
                     <a:solidFill>
                       <a:srgbClr val="000000"/>
                     </a:solidFill>
@@ -11450,7 +11452,7 @@
               </a:ln>
               <a:extLst>
                 <a:ext uri="{91240B29-F687-4f45-9708-019B960494DF}">
-                  <a14:hiddenLine xmlns:a14="http://schemas.microsoft.com/office/drawing/2010/main" xmlns="" w="9525">
+                  <a14:hiddenLine xmlns="" xmlns:a14="http://schemas.microsoft.com/office/drawing/2010/main" w="9525">
                     <a:solidFill>
                       <a:srgbClr val="000000"/>
                     </a:solidFill>
@@ -11518,7 +11520,7 @@
               </a:ln>
               <a:extLst>
                 <a:ext uri="{91240B29-F687-4f45-9708-019B960494DF}">
-                  <a14:hiddenLine xmlns:a14="http://schemas.microsoft.com/office/drawing/2010/main" xmlns="" w="9525">
+                  <a14:hiddenLine xmlns="" xmlns:a14="http://schemas.microsoft.com/office/drawing/2010/main" w="9525">
                     <a:solidFill>
                       <a:srgbClr val="000000"/>
                     </a:solidFill>
@@ -11608,7 +11610,7 @@
               </a:ln>
               <a:extLst>
                 <a:ext uri="{91240B29-F687-4f45-9708-019B960494DF}">
-                  <a14:hiddenLine xmlns:a14="http://schemas.microsoft.com/office/drawing/2010/main" xmlns="" w="9525">
+                  <a14:hiddenLine xmlns="" xmlns:a14="http://schemas.microsoft.com/office/drawing/2010/main" w="9525">
                     <a:solidFill>
                       <a:srgbClr val="000000"/>
                     </a:solidFill>
@@ -11676,7 +11678,7 @@
               </a:ln>
               <a:extLst>
                 <a:ext uri="{91240B29-F687-4f45-9708-019B960494DF}">
-                  <a14:hiddenLine xmlns:a14="http://schemas.microsoft.com/office/drawing/2010/main" xmlns="" w="9525">
+                  <a14:hiddenLine xmlns="" xmlns:a14="http://schemas.microsoft.com/office/drawing/2010/main" w="9525">
                     <a:solidFill>
                       <a:srgbClr val="000000"/>
                     </a:solidFill>
@@ -11766,7 +11768,7 @@
               </a:ln>
               <a:extLst>
                 <a:ext uri="{91240B29-F687-4f45-9708-019B960494DF}">
-                  <a14:hiddenLine xmlns:a14="http://schemas.microsoft.com/office/drawing/2010/main" xmlns="" w="9525">
+                  <a14:hiddenLine xmlns="" xmlns:a14="http://schemas.microsoft.com/office/drawing/2010/main" w="9525">
                     <a:solidFill>
                       <a:srgbClr val="000000"/>
                     </a:solidFill>
@@ -11800,7 +11802,7 @@
               </a:ln>
               <a:extLst>
                 <a:ext uri="{91240B29-F687-4f45-9708-019B960494DF}">
-                  <a14:hiddenLine xmlns:a14="http://schemas.microsoft.com/office/drawing/2010/main" xmlns="" w="9525">
+                  <a14:hiddenLine xmlns="" xmlns:a14="http://schemas.microsoft.com/office/drawing/2010/main" w="9525">
                     <a:solidFill>
                       <a:srgbClr val="000000"/>
                     </a:solidFill>
@@ -11941,7 +11943,7 @@
             <a:fld id="{48A87A34-81AB-432B-8DAE-1953F412C126}" type="datetimeFigureOut">
               <a:rPr lang="en-US" dirty="0"/>
               <a:pPr/>
-              <a:t>5/3/2026</a:t>
+              <a:t>5/4/2026</a:t>
             </a:fld>
             <a:endParaRPr lang="en-US" dirty="0"/>
           </a:p>
@@ -12362,7 +12364,7 @@
           <p:cNvPr id="2" name="Заголовок 1">
             <a:extLst>
               <a:ext uri="{FF2B5EF4-FFF2-40B4-BE49-F238E27FC236}">
-                <a16:creationId xmlns="" xmlns:a16="http://schemas.microsoft.com/office/drawing/2014/main" id="{66474CCB-FAC8-2251-7C09-72612271F472}"/>
+                <a16:creationId xmlns:a16="http://schemas.microsoft.com/office/drawing/2014/main" id="{66474CCB-FAC8-2251-7C09-72612271F472}"/>
               </a:ext>
             </a:extLst>
           </p:cNvPr>
@@ -12391,7 +12393,7 @@
           <p:cNvPr id="3" name="Подзаголовок 2">
             <a:extLst>
               <a:ext uri="{FF2B5EF4-FFF2-40B4-BE49-F238E27FC236}">
-                <a16:creationId xmlns="" xmlns:a16="http://schemas.microsoft.com/office/drawing/2014/main" id="{A1A84B73-3502-E438-AC63-F38A4E4DBDF2}"/>
+                <a16:creationId xmlns:a16="http://schemas.microsoft.com/office/drawing/2014/main" id="{A1A84B73-3502-E438-AC63-F38A4E4DBDF2}"/>
               </a:ext>
             </a:extLst>
           </p:cNvPr>
@@ -12435,7 +12437,7 @@
         <p:cNvPr id="1" name="">
           <a:extLst>
             <a:ext uri="{FF2B5EF4-FFF2-40B4-BE49-F238E27FC236}">
-              <a16:creationId xmlns="" xmlns:a16="http://schemas.microsoft.com/office/drawing/2014/main" id="{964F5CFC-0098-8213-3E7B-51652F332DDC}"/>
+              <a16:creationId xmlns:a16="http://schemas.microsoft.com/office/drawing/2014/main" id="{9D98594E-11EE-AEC4-5601-28A12DEC0F7B}"/>
             </a:ext>
           </a:extLst>
         </p:cNvPr>
@@ -12455,7 +12457,273 @@
           <p:cNvPr id="3" name="Объект 2">
             <a:extLst>
               <a:ext uri="{FF2B5EF4-FFF2-40B4-BE49-F238E27FC236}">
-                <a16:creationId xmlns="" xmlns:a16="http://schemas.microsoft.com/office/drawing/2014/main" id="{ADB88EFC-99D8-B64F-AA43-B327D6F0C91C}"/>
+                <a16:creationId xmlns:a16="http://schemas.microsoft.com/office/drawing/2014/main" id="{745B27DD-4D75-CAAA-240C-5E0239ED7158}"/>
+              </a:ext>
+            </a:extLst>
+          </p:cNvPr>
+          <p:cNvSpPr>
+            <a:spLocks noGrp="1"/>
+          </p:cNvSpPr>
+          <p:nvPr>
+            <p:ph idx="1"/>
+          </p:nvPr>
+        </p:nvSpPr>
+        <p:spPr>
+          <a:xfrm>
+            <a:off x="1010478" y="2758459"/>
+            <a:ext cx="10452652" cy="1614758"/>
+          </a:xfrm>
+        </p:spPr>
+        <p:txBody>
+          <a:bodyPr>
+            <a:normAutofit fontScale="92500" lnSpcReduction="10000"/>
+          </a:bodyPr>
+          <a:lstStyle/>
+          <a:p>
+            <a:pPr marL="0" indent="0" algn="just">
+              <a:buNone/>
+            </a:pPr>
+            <a:r>
+              <a:rPr lang="ru-RU" dirty="0"/>
+              <a:t>Топ-5 товаров по размеру скидки: информация для ознакомления. Интересно, что почти все товары относятся к категориям популярных или массовых маржинальных товаров, только один товар 4889 к категории </a:t>
+            </a:r>
+            <a:r>
+              <a:rPr lang="en-US" dirty="0"/>
+              <a:t>CAC</a:t>
+            </a:r>
+            <a:r>
+              <a:rPr lang="ru-RU" dirty="0"/>
+              <a:t> - Премиальный товар "на распродаже».</a:t>
+            </a:r>
+          </a:p>
+          <a:p>
+            <a:pPr marL="0" indent="0" algn="just">
+              <a:buNone/>
+            </a:pPr>
+            <a:endParaRPr lang="ru-RU" b="1" dirty="0"/>
+          </a:p>
+          <a:p>
+            <a:pPr marL="0" indent="0" algn="just">
+              <a:buNone/>
+            </a:pPr>
+            <a:endParaRPr lang="ru-RU" dirty="0"/>
+          </a:p>
+          <a:p>
+            <a:pPr marL="0" indent="0" algn="just">
+              <a:buNone/>
+            </a:pPr>
+            <a:endParaRPr lang="ru-RU" dirty="0"/>
+          </a:p>
+        </p:txBody>
+      </p:sp>
+      <p:pic>
+        <p:nvPicPr>
+          <p:cNvPr id="2" name="Рисунок 1"/>
+          <p:cNvPicPr>
+            <a:picLocks noChangeAspect="1"/>
+          </p:cNvPicPr>
+          <p:nvPr/>
+        </p:nvPicPr>
+        <p:blipFill>
+          <a:blip r:embed="rId2"/>
+          <a:stretch>
+            <a:fillRect/>
+          </a:stretch>
+        </p:blipFill>
+        <p:spPr>
+          <a:xfrm>
+            <a:off x="4434714" y="358159"/>
+            <a:ext cx="3057525" cy="2400300"/>
+          </a:xfrm>
+          <a:prstGeom prst="rect">
+            <a:avLst/>
+          </a:prstGeom>
+        </p:spPr>
+      </p:pic>
+      <p:pic>
+        <p:nvPicPr>
+          <p:cNvPr id="4" name="Рисунок 3">
+            <a:extLst>
+              <a:ext uri="{FF2B5EF4-FFF2-40B4-BE49-F238E27FC236}">
+                <a16:creationId xmlns:a16="http://schemas.microsoft.com/office/drawing/2014/main" id="{C896A178-2870-46E1-B1C5-D01311C97E68}"/>
+              </a:ext>
+            </a:extLst>
+          </p:cNvPr>
+          <p:cNvPicPr>
+            <a:picLocks noChangeAspect="1"/>
+          </p:cNvPicPr>
+          <p:nvPr/>
+        </p:nvPicPr>
+        <p:blipFill>
+          <a:blip r:embed="rId3"/>
+          <a:stretch>
+            <a:fillRect/>
+          </a:stretch>
+        </p:blipFill>
+        <p:spPr>
+          <a:xfrm>
+            <a:off x="4482338" y="4174704"/>
+            <a:ext cx="2962275" cy="2403813"/>
+          </a:xfrm>
+          <a:prstGeom prst="rect">
+            <a:avLst/>
+          </a:prstGeom>
+        </p:spPr>
+      </p:pic>
+    </p:spTree>
+    <p:extLst>
+      <p:ext uri="{BB962C8B-B14F-4D97-AF65-F5344CB8AC3E}">
+        <p14:creationId xmlns:p14="http://schemas.microsoft.com/office/powerpoint/2010/main" val="3810745421"/>
+      </p:ext>
+    </p:extLst>
+  </p:cSld>
+  <p:clrMapOvr>
+    <a:masterClrMapping/>
+  </p:clrMapOvr>
+</p:sld>
+</file>
+
+<file path=ppt/slides/slide11.xml><?xml version="1.0" encoding="utf-8"?>
+<p:sld xmlns:a="http://schemas.openxmlformats.org/drawingml/2006/main" xmlns:r="http://schemas.openxmlformats.org/officeDocument/2006/relationships" xmlns:p="http://schemas.openxmlformats.org/presentationml/2006/main">
+  <p:cSld>
+    <p:spTree>
+      <p:nvGrpSpPr>
+        <p:cNvPr id="1" name="">
+          <a:extLst>
+            <a:ext uri="{FF2B5EF4-FFF2-40B4-BE49-F238E27FC236}">
+              <a16:creationId xmlns:a16="http://schemas.microsoft.com/office/drawing/2014/main" id="{B2F6AC63-15E4-4D44-904F-EA132D456B7C}"/>
+            </a:ext>
+          </a:extLst>
+        </p:cNvPr>
+        <p:cNvGrpSpPr/>
+        <p:nvPr/>
+      </p:nvGrpSpPr>
+      <p:grpSpPr>
+        <a:xfrm>
+          <a:off x="0" y="0"/>
+          <a:ext cx="0" cy="0"/>
+          <a:chOff x="0" y="0"/>
+          <a:chExt cx="0" cy="0"/>
+        </a:xfrm>
+      </p:grpSpPr>
+      <p:sp>
+        <p:nvSpPr>
+          <p:cNvPr id="3" name="Объект 2">
+            <a:extLst>
+              <a:ext uri="{FF2B5EF4-FFF2-40B4-BE49-F238E27FC236}">
+                <a16:creationId xmlns:a16="http://schemas.microsoft.com/office/drawing/2014/main" id="{E9DAF347-918B-2FC2-8B9F-75200721C6E8}"/>
+              </a:ext>
+            </a:extLst>
+          </p:cNvPr>
+          <p:cNvSpPr>
+            <a:spLocks noGrp="1"/>
+          </p:cNvSpPr>
+          <p:nvPr>
+            <p:ph idx="1"/>
+          </p:nvPr>
+        </p:nvSpPr>
+        <p:spPr>
+          <a:xfrm>
+            <a:off x="1143000" y="649287"/>
+            <a:ext cx="9905999" cy="1649413"/>
+          </a:xfrm>
+        </p:spPr>
+        <p:txBody>
+          <a:bodyPr>
+            <a:normAutofit fontScale="85000" lnSpcReduction="10000"/>
+          </a:bodyPr>
+          <a:lstStyle/>
+          <a:p>
+            <a:pPr marL="0" lvl="0" indent="0" algn="just">
+              <a:buNone/>
+            </a:pPr>
+            <a:r>
+              <a:rPr lang="ru-RU" dirty="0"/>
+              <a:t>Топ-3 (по рангу) товаров-отказников:  за 2023 год было от 4-х до 6-и отмен заказов по данным артикулам (в выгрузке из </a:t>
+            </a:r>
+            <a:r>
+              <a:rPr lang="en-US" dirty="0"/>
+              <a:t>API</a:t>
+            </a:r>
+            <a:r>
+              <a:rPr lang="ru-RU" dirty="0"/>
+              <a:t> отсутствует количество и стоимость заказа, подразумевается, что это - возврат). Информация для дополнительного анализа ассортиментной матрицы – почему именно от этих товаров были отказы.</a:t>
+            </a:r>
+          </a:p>
+        </p:txBody>
+      </p:sp>
+      <p:pic>
+        <p:nvPicPr>
+          <p:cNvPr id="7" name="Рисунок 6">
+            <a:extLst>
+              <a:ext uri="{FF2B5EF4-FFF2-40B4-BE49-F238E27FC236}">
+                <a16:creationId xmlns:a16="http://schemas.microsoft.com/office/drawing/2014/main" id="{6E71F542-8B22-C47A-A96C-1287A4550239}"/>
+              </a:ext>
+            </a:extLst>
+          </p:cNvPr>
+          <p:cNvPicPr>
+            <a:picLocks noChangeAspect="1"/>
+          </p:cNvPicPr>
+          <p:nvPr/>
+        </p:nvPicPr>
+        <p:blipFill>
+          <a:blip r:embed="rId2"/>
+          <a:stretch>
+            <a:fillRect/>
+          </a:stretch>
+        </p:blipFill>
+        <p:spPr>
+          <a:xfrm>
+            <a:off x="3786711" y="2298700"/>
+            <a:ext cx="3914775" cy="2676525"/>
+          </a:xfrm>
+          <a:prstGeom prst="rect">
+            <a:avLst/>
+          </a:prstGeom>
+        </p:spPr>
+      </p:pic>
+    </p:spTree>
+    <p:extLst>
+      <p:ext uri="{BB962C8B-B14F-4D97-AF65-F5344CB8AC3E}">
+        <p14:creationId xmlns:p14="http://schemas.microsoft.com/office/powerpoint/2010/main" val="4113939109"/>
+      </p:ext>
+    </p:extLst>
+  </p:cSld>
+  <p:clrMapOvr>
+    <a:masterClrMapping/>
+  </p:clrMapOvr>
+</p:sld>
+</file>
+
+<file path=ppt/slides/slide12.xml><?xml version="1.0" encoding="utf-8"?>
+<p:sld xmlns:a="http://schemas.openxmlformats.org/drawingml/2006/main" xmlns:r="http://schemas.openxmlformats.org/officeDocument/2006/relationships" xmlns:p="http://schemas.openxmlformats.org/presentationml/2006/main">
+  <p:cSld>
+    <p:spTree>
+      <p:nvGrpSpPr>
+        <p:cNvPr id="1" name="">
+          <a:extLst>
+            <a:ext uri="{FF2B5EF4-FFF2-40B4-BE49-F238E27FC236}">
+              <a16:creationId xmlns:a16="http://schemas.microsoft.com/office/drawing/2014/main" id="{964F5CFC-0098-8213-3E7B-51652F332DDC}"/>
+            </a:ext>
+          </a:extLst>
+        </p:cNvPr>
+        <p:cNvGrpSpPr/>
+        <p:nvPr/>
+      </p:nvGrpSpPr>
+      <p:grpSpPr>
+        <a:xfrm>
+          <a:off x="0" y="0"/>
+          <a:ext cx="0" cy="0"/>
+          <a:chOff x="0" y="0"/>
+          <a:chExt cx="0" cy="0"/>
+        </a:xfrm>
+      </p:grpSpPr>
+      <p:sp>
+        <p:nvSpPr>
+          <p:cNvPr id="3" name="Объект 2">
+            <a:extLst>
+              <a:ext uri="{FF2B5EF4-FFF2-40B4-BE49-F238E27FC236}">
+                <a16:creationId xmlns:a16="http://schemas.microsoft.com/office/drawing/2014/main" id="{ADB88EFC-99D8-B64F-AA43-B327D6F0C91C}"/>
               </a:ext>
             </a:extLst>
           </p:cNvPr>
@@ -12491,39 +12759,7 @@
             </a:r>
             <a:r>
               <a:rPr lang="ru-RU" dirty="0"/>
-              <a:t> имеются данные, содержащие количество товара и нулевую стоимость заказа, </a:t>
-            </a:r>
-            <a:r>
-              <a:rPr lang="ru-RU" dirty="0" smtClean="0"/>
-              <a:t>подразумевается, </a:t>
-            </a:r>
-            <a:r>
-              <a:rPr lang="ru-RU" dirty="0"/>
-              <a:t>что это товар, попавший под акцию, подарок, замену): количество таких товаров </a:t>
-            </a:r>
-            <a:r>
-              <a:rPr lang="ru-RU" dirty="0" smtClean="0"/>
-              <a:t>8142, </a:t>
-            </a:r>
-            <a:r>
-              <a:rPr lang="ru-RU" dirty="0"/>
-              <a:t>общая упущенная выручка </a:t>
-            </a:r>
-            <a:r>
-              <a:rPr lang="ru-RU" dirty="0" smtClean="0"/>
-              <a:t>68,2 </a:t>
-            </a:r>
-            <a:r>
-              <a:rPr lang="ru-RU" dirty="0"/>
-              <a:t>млн. руб., средняя упущенная выручка на 1 товар </a:t>
-            </a:r>
-            <a:r>
-              <a:rPr lang="ru-RU" dirty="0" smtClean="0"/>
-              <a:t>8380 </a:t>
-            </a:r>
-            <a:r>
-              <a:rPr lang="ru-RU" dirty="0"/>
-              <a:t>руб. </a:t>
+              <a:t> имеются данные, содержащие количество товара и нулевую стоимость заказа, подразумевается, что это товар, попавший под акцию, подарок, замену): количество таких товаров 8142, общая упущенная выручка 68,2 млн. руб., средняя упущенная выручка на 1 товар 8380 руб. </a:t>
             </a:r>
           </a:p>
           <a:p>
@@ -12542,7 +12778,7 @@
           <p:cNvPr id="4" name="Рисунок 3">
             <a:extLst>
               <a:ext uri="{FF2B5EF4-FFF2-40B4-BE49-F238E27FC236}">
-                <a16:creationId xmlns="" xmlns:a16="http://schemas.microsoft.com/office/drawing/2014/main" id="{E7E45C83-92B1-7D5A-032A-737CAF571B88}"/>
+                <a16:creationId xmlns:a16="http://schemas.microsoft.com/office/drawing/2014/main" id="{E7E45C83-92B1-7D5A-032A-737CAF571B88}"/>
               </a:ext>
             </a:extLst>
           </p:cNvPr>
@@ -12602,7 +12838,7 @@
           <p:cNvPr id="2" name="Заголовок 1">
             <a:extLst>
               <a:ext uri="{FF2B5EF4-FFF2-40B4-BE49-F238E27FC236}">
-                <a16:creationId xmlns="" xmlns:a16="http://schemas.microsoft.com/office/drawing/2014/main" id="{3C792A5A-C2DD-FA6E-B94A-61FEBB0A38B7}"/>
+                <a16:creationId xmlns:a16="http://schemas.microsoft.com/office/drawing/2014/main" id="{3C792A5A-C2DD-FA6E-B94A-61FEBB0A38B7}"/>
               </a:ext>
             </a:extLst>
           </p:cNvPr>
@@ -12625,10 +12861,9 @@
           <a:p>
             <a:pPr algn="ctr"/>
             <a:r>
-              <a:rPr lang="ru-RU" dirty="0" smtClean="0"/>
+              <a:rPr lang="ru-RU" dirty="0"/>
               <a:t>АССОРТИМЕНТНЫЙ АНАЛИЗ</a:t>
             </a:r>
-            <a:endParaRPr lang="ru-RU" dirty="0"/>
           </a:p>
         </p:txBody>
       </p:sp>
@@ -12637,7 +12872,7 @@
           <p:cNvPr id="3" name="Объект 2">
             <a:extLst>
               <a:ext uri="{FF2B5EF4-FFF2-40B4-BE49-F238E27FC236}">
-                <a16:creationId xmlns="" xmlns:a16="http://schemas.microsoft.com/office/drawing/2014/main" id="{5DCFA8C6-8059-6DDE-BBE7-BD9C72B627A9}"/>
+                <a16:creationId xmlns:a16="http://schemas.microsoft.com/office/drawing/2014/main" id="{5DCFA8C6-8059-6DDE-BBE7-BD9C72B627A9}"/>
               </a:ext>
             </a:extLst>
           </p:cNvPr>
@@ -12663,27 +12898,11 @@
             </a:pPr>
             <a:r>
               <a:rPr lang="ru-RU" dirty="0"/>
-              <a:t>это </a:t>
-            </a:r>
-            <a:r>
-              <a:rPr lang="ru-RU" dirty="0" smtClean="0"/>
-              <a:t>изучение</a:t>
-            </a:r>
-            <a:r>
-              <a:rPr lang="ru-RU" dirty="0"/>
-              <a:t> </a:t>
-            </a:r>
-            <a:r>
-              <a:rPr lang="ru-RU" dirty="0" smtClean="0"/>
-              <a:t>того, </a:t>
-            </a:r>
-            <a:r>
-              <a:rPr lang="ru-RU" b="1" dirty="0" smtClean="0"/>
-              <a:t>какие </a:t>
+              <a:t>это изучение того, </a:t>
             </a:r>
             <a:r>
               <a:rPr lang="ru-RU" b="1" dirty="0"/>
-              <a:t>товары вы продаёте</a:t>
+              <a:t>какие товары вы продаёте</a:t>
             </a:r>
             <a:r>
               <a:rPr lang="ru-RU" dirty="0"/>
@@ -12752,7 +12971,7 @@
           <p:cNvPr id="2" name="Заголовок 1">
             <a:extLst>
               <a:ext uri="{FF2B5EF4-FFF2-40B4-BE49-F238E27FC236}">
-                <a16:creationId xmlns="" xmlns:a16="http://schemas.microsoft.com/office/drawing/2014/main" id="{3C792A5A-C2DD-FA6E-B94A-61FEBB0A38B7}"/>
+                <a16:creationId xmlns:a16="http://schemas.microsoft.com/office/drawing/2014/main" id="{3C792A5A-C2DD-FA6E-B94A-61FEBB0A38B7}"/>
               </a:ext>
             </a:extLst>
           </p:cNvPr>
@@ -12790,7 +13009,7 @@
           <p:cNvPr id="3" name="Объект 2">
             <a:extLst>
               <a:ext uri="{FF2B5EF4-FFF2-40B4-BE49-F238E27FC236}">
-                <a16:creationId xmlns="" xmlns:a16="http://schemas.microsoft.com/office/drawing/2014/main" id="{5DCFA8C6-8059-6DDE-BBE7-BD9C72B627A9}"/>
+                <a16:creationId xmlns:a16="http://schemas.microsoft.com/office/drawing/2014/main" id="{5DCFA8C6-8059-6DDE-BBE7-BD9C72B627A9}"/>
               </a:ext>
             </a:extLst>
           </p:cNvPr>
@@ -12855,10 +13074,10 @@
       </p:sp>
       <p:pic>
         <p:nvPicPr>
-          <p:cNvPr id="7" name="Рисунок 6">
+          <p:cNvPr id="4" name="Рисунок 3">
             <a:extLst>
               <a:ext uri="{FF2B5EF4-FFF2-40B4-BE49-F238E27FC236}">
-                <a16:creationId xmlns="" xmlns:a16="http://schemas.microsoft.com/office/drawing/2014/main" id="{703A771C-9524-697C-6251-B162574C4CAB}"/>
+                <a16:creationId xmlns:a16="http://schemas.microsoft.com/office/drawing/2014/main" id="{B7529933-0F9C-43E8-B1F5-459DA3184DA0}"/>
               </a:ext>
             </a:extLst>
           </p:cNvPr>
@@ -12875,8 +13094,8 @@
         </p:blipFill>
         <p:spPr>
           <a:xfrm>
-            <a:off x="3216274" y="2746374"/>
-            <a:ext cx="7413625" cy="3639211"/>
+            <a:off x="1353378" y="3117429"/>
+            <a:ext cx="9195352" cy="3540546"/>
           </a:xfrm>
           <a:prstGeom prst="rect">
             <a:avLst/>
@@ -12904,7 +13123,7 @@
         <p:cNvPr id="1" name="">
           <a:extLst>
             <a:ext uri="{FF2B5EF4-FFF2-40B4-BE49-F238E27FC236}">
-              <a16:creationId xmlns="" xmlns:a16="http://schemas.microsoft.com/office/drawing/2014/main" id="{276C961E-28BB-BE52-409B-6DA3AF951108}"/>
+              <a16:creationId xmlns:a16="http://schemas.microsoft.com/office/drawing/2014/main" id="{276C961E-28BB-BE52-409B-6DA3AF951108}"/>
             </a:ext>
           </a:extLst>
         </p:cNvPr>
@@ -12924,7 +13143,7 @@
           <p:cNvPr id="3" name="Объект 2">
             <a:extLst>
               <a:ext uri="{FF2B5EF4-FFF2-40B4-BE49-F238E27FC236}">
-                <a16:creationId xmlns="" xmlns:a16="http://schemas.microsoft.com/office/drawing/2014/main" id="{060EA57B-19C5-1FE2-F90F-2974D986C64B}"/>
+                <a16:creationId xmlns:a16="http://schemas.microsoft.com/office/drawing/2014/main" id="{060EA57B-19C5-1FE2-F90F-2974D986C64B}"/>
               </a:ext>
             </a:extLst>
           </p:cNvPr>
@@ -13084,7 +13303,7 @@
           <p:cNvPr id="3" name="Объект 2">
             <a:extLst>
               <a:ext uri="{FF2B5EF4-FFF2-40B4-BE49-F238E27FC236}">
-                <a16:creationId xmlns="" xmlns:a16="http://schemas.microsoft.com/office/drawing/2014/main" id="{B5211767-7C5F-5788-6E08-553536117460}"/>
+                <a16:creationId xmlns:a16="http://schemas.microsoft.com/office/drawing/2014/main" id="{B5211767-7C5F-5788-6E08-553536117460}"/>
               </a:ext>
             </a:extLst>
           </p:cNvPr>
@@ -13131,10 +13350,10 @@
       </p:sp>
       <p:pic>
         <p:nvPicPr>
-          <p:cNvPr id="6" name="Рисунок 5">
+          <p:cNvPr id="2" name="Рисунок 1">
             <a:extLst>
               <a:ext uri="{FF2B5EF4-FFF2-40B4-BE49-F238E27FC236}">
-                <a16:creationId xmlns="" xmlns:a16="http://schemas.microsoft.com/office/drawing/2014/main" id="{37F1211B-1F27-932E-72EA-F27BCE5C2265}"/>
+                <a16:creationId xmlns:a16="http://schemas.microsoft.com/office/drawing/2014/main" id="{8C1D45B7-B30D-48B6-AA3B-D4FA1CF22156}"/>
               </a:ext>
             </a:extLst>
           </p:cNvPr>
@@ -13151,38 +13370,8 @@
         </p:blipFill>
         <p:spPr>
           <a:xfrm>
-            <a:off x="374098" y="3429000"/>
-            <a:ext cx="5792303" cy="2970212"/>
-          </a:xfrm>
-          <a:prstGeom prst="rect">
-            <a:avLst/>
-          </a:prstGeom>
-        </p:spPr>
-      </p:pic>
-      <p:pic>
-        <p:nvPicPr>
-          <p:cNvPr id="8" name="Рисунок 7">
-            <a:extLst>
-              <a:ext uri="{FF2B5EF4-FFF2-40B4-BE49-F238E27FC236}">
-                <a16:creationId xmlns="" xmlns:a16="http://schemas.microsoft.com/office/drawing/2014/main" id="{2BE4DFF2-8EE2-EA13-1E5D-54CAC77F7211}"/>
-              </a:ext>
-            </a:extLst>
-          </p:cNvPr>
-          <p:cNvPicPr>
-            <a:picLocks noChangeAspect="1"/>
-          </p:cNvPicPr>
-          <p:nvPr/>
-        </p:nvPicPr>
-        <p:blipFill>
-          <a:blip r:embed="rId3"/>
-          <a:stretch>
-            <a:fillRect/>
-          </a:stretch>
-        </p:blipFill>
-        <p:spPr>
-          <a:xfrm>
-            <a:off x="6374165" y="3429000"/>
-            <a:ext cx="5443737" cy="2974975"/>
+            <a:off x="2419350" y="3586163"/>
+            <a:ext cx="7353300" cy="2876550"/>
           </a:xfrm>
           <a:prstGeom prst="rect">
             <a:avLst/>
@@ -13210,7 +13399,7 @@
         <p:cNvPr id="1" name="">
           <a:extLst>
             <a:ext uri="{FF2B5EF4-FFF2-40B4-BE49-F238E27FC236}">
-              <a16:creationId xmlns="" xmlns:a16="http://schemas.microsoft.com/office/drawing/2014/main" id="{968327AD-398E-C717-F7DD-2DEF4DC7296F}"/>
+              <a16:creationId xmlns:a16="http://schemas.microsoft.com/office/drawing/2014/main" id="{968327AD-398E-C717-F7DD-2DEF4DC7296F}"/>
             </a:ext>
           </a:extLst>
         </p:cNvPr>
@@ -13230,7 +13419,7 @@
           <p:cNvPr id="3" name="Объект 2">
             <a:extLst>
               <a:ext uri="{FF2B5EF4-FFF2-40B4-BE49-F238E27FC236}">
-                <a16:creationId xmlns="" xmlns:a16="http://schemas.microsoft.com/office/drawing/2014/main" id="{0A7A6DBD-A582-0193-3170-114B0686595B}"/>
+                <a16:creationId xmlns:a16="http://schemas.microsoft.com/office/drawing/2014/main" id="{0A7A6DBD-A582-0193-3170-114B0686595B}"/>
               </a:ext>
             </a:extLst>
           </p:cNvPr>
@@ -13244,12 +13433,12 @@
         <p:spPr>
           <a:xfrm>
             <a:off x="1213402" y="395286"/>
-            <a:ext cx="9905999" cy="4646614"/>
+            <a:ext cx="9905999" cy="5687462"/>
           </a:xfrm>
         </p:spPr>
         <p:txBody>
           <a:bodyPr>
-            <a:normAutofit fontScale="85000" lnSpcReduction="20000"/>
+            <a:normAutofit fontScale="92500" lnSpcReduction="10000"/>
           </a:bodyPr>
           <a:lstStyle/>
           <a:p>
@@ -13331,36 +13520,6 @@
           </a:p>
         </p:txBody>
       </p:sp>
-      <p:pic>
-        <p:nvPicPr>
-          <p:cNvPr id="5" name="Рисунок 4">
-            <a:extLst>
-              <a:ext uri="{FF2B5EF4-FFF2-40B4-BE49-F238E27FC236}">
-                <a16:creationId xmlns="" xmlns:a16="http://schemas.microsoft.com/office/drawing/2014/main" id="{422DA451-800A-2C04-45EC-AB5FC0253285}"/>
-              </a:ext>
-            </a:extLst>
-          </p:cNvPr>
-          <p:cNvPicPr>
-            <a:picLocks noChangeAspect="1"/>
-          </p:cNvPicPr>
-          <p:nvPr/>
-        </p:nvPicPr>
-        <p:blipFill>
-          <a:blip r:embed="rId2"/>
-          <a:stretch>
-            <a:fillRect/>
-          </a:stretch>
-        </p:blipFill>
-        <p:spPr>
-          <a:xfrm>
-            <a:off x="4805555" y="3754438"/>
-            <a:ext cx="6313846" cy="2959100"/>
-          </a:xfrm>
-          <a:prstGeom prst="rect">
-            <a:avLst/>
-          </a:prstGeom>
-        </p:spPr>
-      </p:pic>
     </p:spTree>
     <p:extLst>
       <p:ext uri="{BB962C8B-B14F-4D97-AF65-F5344CB8AC3E}">
@@ -13382,7 +13541,73 @@
         <p:cNvPr id="1" name="">
           <a:extLst>
             <a:ext uri="{FF2B5EF4-FFF2-40B4-BE49-F238E27FC236}">
-              <a16:creationId xmlns="" xmlns:a16="http://schemas.microsoft.com/office/drawing/2014/main" id="{3F7DD344-D933-A9CE-4045-8F6982671B0E}"/>
+              <a16:creationId xmlns:a16="http://schemas.microsoft.com/office/drawing/2014/main" id="{968327AD-398E-C717-F7DD-2DEF4DC7296F}"/>
+            </a:ext>
+          </a:extLst>
+        </p:cNvPr>
+        <p:cNvGrpSpPr/>
+        <p:nvPr/>
+      </p:nvGrpSpPr>
+      <p:grpSpPr>
+        <a:xfrm>
+          <a:off x="0" y="0"/>
+          <a:ext cx="0" cy="0"/>
+          <a:chOff x="0" y="0"/>
+          <a:chExt cx="0" cy="0"/>
+        </a:xfrm>
+      </p:grpSpPr>
+      <p:pic>
+        <p:nvPicPr>
+          <p:cNvPr id="2" name="Рисунок 1">
+            <a:extLst>
+              <a:ext uri="{FF2B5EF4-FFF2-40B4-BE49-F238E27FC236}">
+                <a16:creationId xmlns:a16="http://schemas.microsoft.com/office/drawing/2014/main" id="{A21EA240-3907-4B16-B87F-C494A2A6B8F0}"/>
+              </a:ext>
+            </a:extLst>
+          </p:cNvPr>
+          <p:cNvPicPr>
+            <a:picLocks noChangeAspect="1"/>
+          </p:cNvPicPr>
+          <p:nvPr/>
+        </p:nvPicPr>
+        <p:blipFill>
+          <a:blip r:embed="rId2"/>
+          <a:stretch>
+            <a:fillRect/>
+          </a:stretch>
+        </p:blipFill>
+        <p:spPr>
+          <a:xfrm>
+            <a:off x="509519" y="1273830"/>
+            <a:ext cx="11172961" cy="3894518"/>
+          </a:xfrm>
+          <a:prstGeom prst="rect">
+            <a:avLst/>
+          </a:prstGeom>
+        </p:spPr>
+      </p:pic>
+    </p:spTree>
+    <p:extLst>
+      <p:ext uri="{BB962C8B-B14F-4D97-AF65-F5344CB8AC3E}">
+        <p14:creationId xmlns:p14="http://schemas.microsoft.com/office/powerpoint/2010/main" val="1956528649"/>
+      </p:ext>
+    </p:extLst>
+  </p:cSld>
+  <p:clrMapOvr>
+    <a:masterClrMapping/>
+  </p:clrMapOvr>
+</p:sld>
+</file>
+
+<file path=ppt/slides/slide8.xml><?xml version="1.0" encoding="utf-8"?>
+<p:sld xmlns:a="http://schemas.openxmlformats.org/drawingml/2006/main" xmlns:r="http://schemas.openxmlformats.org/officeDocument/2006/relationships" xmlns:p="http://schemas.openxmlformats.org/presentationml/2006/main">
+  <p:cSld>
+    <p:spTree>
+      <p:nvGrpSpPr>
+        <p:cNvPr id="1" name="">
+          <a:extLst>
+            <a:ext uri="{FF2B5EF4-FFF2-40B4-BE49-F238E27FC236}">
+              <a16:creationId xmlns:a16="http://schemas.microsoft.com/office/drawing/2014/main" id="{3F7DD344-D933-A9CE-4045-8F6982671B0E}"/>
             </a:ext>
           </a:extLst>
         </p:cNvPr>
@@ -13402,7 +13627,7 @@
           <p:cNvPr id="3" name="Объект 2">
             <a:extLst>
               <a:ext uri="{FF2B5EF4-FFF2-40B4-BE49-F238E27FC236}">
-                <a16:creationId xmlns="" xmlns:a16="http://schemas.microsoft.com/office/drawing/2014/main" id="{AC50183A-1E33-39CB-60E5-88DDC52E5FE5}"/>
+                <a16:creationId xmlns:a16="http://schemas.microsoft.com/office/drawing/2014/main" id="{AC50183A-1E33-39CB-60E5-88DDC52E5FE5}"/>
               </a:ext>
             </a:extLst>
           </p:cNvPr>
@@ -13443,10 +13668,10 @@
       </p:sp>
       <p:pic>
         <p:nvPicPr>
-          <p:cNvPr id="4" name="Рисунок 3">
+          <p:cNvPr id="2" name="Рисунок 1">
             <a:extLst>
               <a:ext uri="{FF2B5EF4-FFF2-40B4-BE49-F238E27FC236}">
-                <a16:creationId xmlns="" xmlns:a16="http://schemas.microsoft.com/office/drawing/2014/main" id="{D95AE1FB-165D-4953-56F0-A680E0B0602A}"/>
+                <a16:creationId xmlns:a16="http://schemas.microsoft.com/office/drawing/2014/main" id="{8DC1023D-C959-4D5D-A68C-DE3053395165}"/>
               </a:ext>
             </a:extLst>
           </p:cNvPr>
@@ -13463,8 +13688,8 @@
         </p:blipFill>
         <p:spPr>
           <a:xfrm>
-            <a:off x="2900362" y="2198687"/>
-            <a:ext cx="6391275" cy="3705225"/>
+            <a:off x="3865873" y="2044700"/>
+            <a:ext cx="4460253" cy="3501059"/>
           </a:xfrm>
           <a:prstGeom prst="rect">
             <a:avLst/>
@@ -13484,7 +13709,7 @@
 </p:sld>
 </file>
 
-<file path=ppt/slides/slide8.xml><?xml version="1.0" encoding="utf-8"?>
+<file path=ppt/slides/slide9.xml><?xml version="1.0" encoding="utf-8"?>
 <p:sld xmlns:a="http://schemas.openxmlformats.org/drawingml/2006/main" xmlns:r="http://schemas.openxmlformats.org/officeDocument/2006/relationships" xmlns:p="http://schemas.openxmlformats.org/presentationml/2006/main">
   <p:cSld>
     <p:spTree>
@@ -13492,7 +13717,7 @@
         <p:cNvPr id="1" name="">
           <a:extLst>
             <a:ext uri="{FF2B5EF4-FFF2-40B4-BE49-F238E27FC236}">
-              <a16:creationId xmlns="" xmlns:a16="http://schemas.microsoft.com/office/drawing/2014/main" id="{9D98594E-11EE-AEC4-5601-28A12DEC0F7B}"/>
+              <a16:creationId xmlns:a16="http://schemas.microsoft.com/office/drawing/2014/main" id="{9D98594E-11EE-AEC4-5601-28A12DEC0F7B}"/>
             </a:ext>
           </a:extLst>
         </p:cNvPr>
@@ -13512,7 +13737,7 @@
           <p:cNvPr id="3" name="Объект 2">
             <a:extLst>
               <a:ext uri="{FF2B5EF4-FFF2-40B4-BE49-F238E27FC236}">
-                <a16:creationId xmlns="" xmlns:a16="http://schemas.microsoft.com/office/drawing/2014/main" id="{745B27DD-4D75-CAAA-240C-5E0239ED7158}"/>
+                <a16:creationId xmlns:a16="http://schemas.microsoft.com/office/drawing/2014/main" id="{745B27DD-4D75-CAAA-240C-5E0239ED7158}"/>
               </a:ext>
             </a:extLst>
           </p:cNvPr>
@@ -13525,8 +13750,8 @@
         </p:nvSpPr>
         <p:spPr>
           <a:xfrm>
-            <a:off x="1143000" y="235928"/>
-            <a:ext cx="9905999" cy="3872609"/>
+            <a:off x="1143000" y="235927"/>
+            <a:ext cx="10174357" cy="6257637"/>
           </a:xfrm>
         </p:spPr>
         <p:txBody>
@@ -13549,48 +13774,54 @@
             </a:pPr>
             <a:r>
               <a:rPr lang="ru-RU" dirty="0"/>
-              <a:t>Например, артикул 46596 имеет категорию AZ, здесь необходимо иметь страховой запас товара и искать причины нестабильности спроса. Другие 4 артикула имеют категорию AY</a:t>
-            </a:r>
-            <a:r>
-              <a:rPr lang="ru-RU" dirty="0" smtClean="0"/>
-              <a:t>.</a:t>
+              <a:t>Например, артикул 46596 имеет категорию AZ, здесь необходимо иметь страховой запас товара и искать причины нестабильности спроса. Другие 4 артикула имеют категорию AY.</a:t>
             </a:r>
           </a:p>
           <a:p>
             <a:pPr marL="0" indent="0" algn="just">
               <a:buNone/>
             </a:pPr>
+            <a:endParaRPr lang="ru-RU" dirty="0"/>
+          </a:p>
+          <a:p>
+            <a:pPr marL="0" indent="0" algn="just">
+              <a:buNone/>
+            </a:pPr>
+            <a:endParaRPr lang="ru-RU" dirty="0"/>
+          </a:p>
+          <a:p>
+            <a:pPr marL="0" indent="0" algn="just">
+              <a:buNone/>
+            </a:pPr>
+            <a:endParaRPr lang="ru-RU" dirty="0"/>
+          </a:p>
+          <a:p>
+            <a:pPr marL="0" indent="0" algn="just">
+              <a:buNone/>
+            </a:pPr>
+            <a:endParaRPr lang="ru-RU" dirty="0"/>
+          </a:p>
+          <a:p>
+            <a:pPr marL="0" indent="0" algn="just">
+              <a:buNone/>
+            </a:pPr>
+            <a:endParaRPr lang="ru-RU" dirty="0"/>
+          </a:p>
+          <a:p>
+            <a:pPr marL="0" indent="0" algn="just">
+              <a:buNone/>
+            </a:pPr>
             <a:r>
               <a:rPr lang="ru-RU" dirty="0"/>
-              <a:t>Анализ топ-5 товаров по сумме продаж: </a:t>
-            </a:r>
-            <a:r>
-              <a:rPr lang="ru-RU" dirty="0" smtClean="0"/>
-              <a:t>данные для ознакомления. Сумма </a:t>
+              <a:t>Анализ топ-5 товаров по сумме продаж: данные для ознакомления. Сумма продаж этих товаров на сумму от 120 млн. руб. в год на онлайн </a:t>
+            </a:r>
+            <a:r>
+              <a:rPr lang="ru-RU" dirty="0" err="1"/>
+              <a:t>маркетплейсе</a:t>
             </a:r>
             <a:r>
               <a:rPr lang="ru-RU" dirty="0"/>
-              <a:t>продаж этих товаров на сумму </a:t>
-            </a:r>
-            <a:r>
-              <a:rPr lang="ru-RU" dirty="0" smtClean="0"/>
-              <a:t>от 120 </a:t>
-            </a:r>
-            <a:r>
-              <a:rPr lang="ru-RU" dirty="0"/>
-              <a:t>млн. руб. в год на онлайн </a:t>
-            </a:r>
-            <a:r>
-              <a:rPr lang="ru-RU" dirty="0" err="1" smtClean="0"/>
-              <a:t>маркетплейсе</a:t>
-            </a:r>
-            <a:r>
-              <a:rPr lang="ru-RU" dirty="0" smtClean="0"/>
-              <a:t> </a:t>
-            </a:r>
-            <a:r>
-              <a:rPr lang="ru-RU" dirty="0"/>
-              <a:t>- это между «крупным </a:t>
+              <a:t> - это между «крупным </a:t>
             </a:r>
             <a:r>
               <a:rPr lang="ru-RU" dirty="0" err="1"/>
@@ -13598,11 +13829,7 @@
             </a:r>
             <a:r>
               <a:rPr lang="ru-RU" dirty="0"/>
-              <a:t>» и «средним» товаром</a:t>
-            </a:r>
-            <a:r>
-              <a:rPr lang="ru-RU" dirty="0" smtClean="0"/>
-              <a:t>.</a:t>
+              <a:t>» и «средним» товаром.</a:t>
             </a:r>
           </a:p>
           <a:p>
@@ -13611,21 +13838,8 @@
             </a:pPr>
             <a:r>
               <a:rPr lang="ru-RU" dirty="0"/>
-              <a:t>Например, артикул </a:t>
-            </a:r>
-            <a:r>
-              <a:rPr lang="ru-RU" dirty="0" smtClean="0"/>
-              <a:t>30239 </a:t>
-            </a:r>
-            <a:r>
-              <a:rPr lang="ru-RU" dirty="0"/>
-              <a:t>имеет категорию AZ, здесь необходимо иметь страховой запас товара и искать причины нестабильности спроса. Другие 4 артикула имеют категорию </a:t>
-            </a:r>
-            <a:r>
-              <a:rPr lang="ru-RU" dirty="0" smtClean="0"/>
-              <a:t>AХ.</a:t>
-            </a:r>
-            <a:endParaRPr lang="ru-RU" dirty="0"/>
+              <a:t>Например, артикул 30239 имеет категорию AZ, здесь необходимо иметь страховой запас товара и искать причины нестабильности спроса. Другие 4 артикула имеют категорию AХ.</a:t>
+            </a:r>
           </a:p>
           <a:p>
             <a:pPr marL="0" indent="0" algn="just">
@@ -13640,7 +13854,7 @@
           <p:cNvPr id="5" name="Рисунок 4">
             <a:extLst>
               <a:ext uri="{FF2B5EF4-FFF2-40B4-BE49-F238E27FC236}">
-                <a16:creationId xmlns="" xmlns:a16="http://schemas.microsoft.com/office/drawing/2014/main" id="{9FD47A18-9F93-A759-9896-4A506140FC11}"/>
+                <a16:creationId xmlns:a16="http://schemas.microsoft.com/office/drawing/2014/main" id="{9FD47A18-9F93-A759-9896-4A506140FC11}"/>
               </a:ext>
             </a:extLst>
           </p:cNvPr>
@@ -13657,32 +13871,8 @@
         </p:blipFill>
         <p:spPr>
           <a:xfrm>
-            <a:off x="2230785" y="4248237"/>
+            <a:off x="5181601" y="1624346"/>
             <a:ext cx="3590925" cy="2400300"/>
-          </a:xfrm>
-          <a:prstGeom prst="rect">
-            <a:avLst/>
-          </a:prstGeom>
-        </p:spPr>
-      </p:pic>
-      <p:pic>
-        <p:nvPicPr>
-          <p:cNvPr id="2" name="Рисунок 1"/>
-          <p:cNvPicPr>
-            <a:picLocks noChangeAspect="1"/>
-          </p:cNvPicPr>
-          <p:nvPr/>
-        </p:nvPicPr>
-        <p:blipFill>
-          <a:blip r:embed="rId3"/>
-          <a:stretch>
-            <a:fillRect/>
-          </a:stretch>
-        </p:blipFill>
-        <p:spPr>
-          <a:xfrm>
-            <a:off x="6847560" y="4248237"/>
-            <a:ext cx="3057525" cy="2400300"/>
           </a:xfrm>
           <a:prstGeom prst="rect">
             <a:avLst/>
@@ -13692,140 +13882,7 @@
     </p:spTree>
     <p:extLst>
       <p:ext uri="{BB962C8B-B14F-4D97-AF65-F5344CB8AC3E}">
-        <p14:creationId xmlns:p14="http://schemas.microsoft.com/office/powerpoint/2010/main" val="3810745421"/>
-      </p:ext>
-    </p:extLst>
-  </p:cSld>
-  <p:clrMapOvr>
-    <a:masterClrMapping/>
-  </p:clrMapOvr>
-</p:sld>
-</file>
-
-<file path=ppt/slides/slide9.xml><?xml version="1.0" encoding="utf-8"?>
-<p:sld xmlns:a="http://schemas.openxmlformats.org/drawingml/2006/main" xmlns:r="http://schemas.openxmlformats.org/officeDocument/2006/relationships" xmlns:p="http://schemas.openxmlformats.org/presentationml/2006/main">
-  <p:cSld>
-    <p:spTree>
-      <p:nvGrpSpPr>
-        <p:cNvPr id="1" name="">
-          <a:extLst>
-            <a:ext uri="{FF2B5EF4-FFF2-40B4-BE49-F238E27FC236}">
-              <a16:creationId xmlns="" xmlns:a16="http://schemas.microsoft.com/office/drawing/2014/main" id="{B2F6AC63-15E4-4D44-904F-EA132D456B7C}"/>
-            </a:ext>
-          </a:extLst>
-        </p:cNvPr>
-        <p:cNvGrpSpPr/>
-        <p:nvPr/>
-      </p:nvGrpSpPr>
-      <p:grpSpPr>
-        <a:xfrm>
-          <a:off x="0" y="0"/>
-          <a:ext cx="0" cy="0"/>
-          <a:chOff x="0" y="0"/>
-          <a:chExt cx="0" cy="0"/>
-        </a:xfrm>
-      </p:grpSpPr>
-      <p:sp>
-        <p:nvSpPr>
-          <p:cNvPr id="3" name="Объект 2">
-            <a:extLst>
-              <a:ext uri="{FF2B5EF4-FFF2-40B4-BE49-F238E27FC236}">
-                <a16:creationId xmlns="" xmlns:a16="http://schemas.microsoft.com/office/drawing/2014/main" id="{E9DAF347-918B-2FC2-8B9F-75200721C6E8}"/>
-              </a:ext>
-            </a:extLst>
-          </p:cNvPr>
-          <p:cNvSpPr>
-            <a:spLocks noGrp="1"/>
-          </p:cNvSpPr>
-          <p:nvPr>
-            <p:ph idx="1"/>
-          </p:nvPr>
-        </p:nvSpPr>
-        <p:spPr>
-          <a:xfrm>
-            <a:off x="1143000" y="649287"/>
-            <a:ext cx="9905999" cy="1649413"/>
-          </a:xfrm>
-        </p:spPr>
-        <p:txBody>
-          <a:bodyPr>
-            <a:normAutofit fontScale="85000" lnSpcReduction="10000"/>
-          </a:bodyPr>
-          <a:lstStyle/>
-          <a:p>
-            <a:pPr marL="0" lvl="0" indent="0" algn="just">
-              <a:buNone/>
-            </a:pPr>
-            <a:r>
-              <a:rPr lang="ru-RU" dirty="0"/>
-              <a:t>Топ-3 (по рангу) </a:t>
-            </a:r>
-            <a:r>
-              <a:rPr lang="ru-RU" dirty="0" smtClean="0"/>
-              <a:t>товаров-отказников</a:t>
-            </a:r>
-            <a:r>
-              <a:rPr lang="ru-RU" dirty="0"/>
-              <a:t>:  за 2023 год было от 4-х до 6-и отмен заказов по данным артикулам (в выгрузке из </a:t>
-            </a:r>
-            <a:r>
-              <a:rPr lang="en-US" dirty="0"/>
-              <a:t>API</a:t>
-            </a:r>
-            <a:r>
-              <a:rPr lang="ru-RU" dirty="0"/>
-              <a:t> отсутствует количество и стоимость заказа, подразумевается, что это - возврат). Информация для дополнительного анализа ассортиментной </a:t>
-            </a:r>
-            <a:r>
-              <a:rPr lang="ru-RU" dirty="0" smtClean="0"/>
-              <a:t>матрицы</a:t>
-            </a:r>
-            <a:r>
-              <a:rPr lang="ru-RU" dirty="0"/>
-              <a:t> </a:t>
-            </a:r>
-            <a:r>
-              <a:rPr lang="ru-RU" dirty="0" smtClean="0"/>
-              <a:t>– почему именно от этих товаров были отказы.</a:t>
-            </a:r>
-            <a:endParaRPr lang="ru-RU" dirty="0"/>
-          </a:p>
-        </p:txBody>
-      </p:sp>
-      <p:pic>
-        <p:nvPicPr>
-          <p:cNvPr id="7" name="Рисунок 6">
-            <a:extLst>
-              <a:ext uri="{FF2B5EF4-FFF2-40B4-BE49-F238E27FC236}">
-                <a16:creationId xmlns="" xmlns:a16="http://schemas.microsoft.com/office/drawing/2014/main" id="{6E71F542-8B22-C47A-A96C-1287A4550239}"/>
-              </a:ext>
-            </a:extLst>
-          </p:cNvPr>
-          <p:cNvPicPr>
-            <a:picLocks noChangeAspect="1"/>
-          </p:cNvPicPr>
-          <p:nvPr/>
-        </p:nvPicPr>
-        <p:blipFill>
-          <a:blip r:embed="rId2"/>
-          <a:stretch>
-            <a:fillRect/>
-          </a:stretch>
-        </p:blipFill>
-        <p:spPr>
-          <a:xfrm>
-            <a:off x="3706812" y="2624137"/>
-            <a:ext cx="3914775" cy="2676525"/>
-          </a:xfrm>
-          <a:prstGeom prst="rect">
-            <a:avLst/>
-          </a:prstGeom>
-        </p:spPr>
-      </p:pic>
-    </p:spTree>
-    <p:extLst>
-      <p:ext uri="{BB962C8B-B14F-4D97-AF65-F5344CB8AC3E}">
-        <p14:creationId xmlns:p14="http://schemas.microsoft.com/office/powerpoint/2010/main" val="4113939109"/>
+        <p14:creationId xmlns:p14="http://schemas.microsoft.com/office/powerpoint/2010/main" val="3491145417"/>
       </p:ext>
     </p:extLst>
   </p:cSld>
